--- a/documents/planning.pptx
+++ b/documents/planning.pptx
@@ -19,6 +19,11 @@
     <p:sldId id="267" r:id="rId13"/>
     <p:sldId id="268" r:id="rId14"/>
     <p:sldId id="269" r:id="rId15"/>
+    <p:sldId id="270" r:id="rId16"/>
+    <p:sldId id="271" r:id="rId17"/>
+    <p:sldId id="272" r:id="rId18"/>
+    <p:sldId id="273" r:id="rId19"/>
+    <p:sldId id="274" r:id="rId20"/>
   </p:sldIdLst>
   <p:sldSz cx="12192000" cy="6858000"/>
   <p:notesSz cx="6858000" cy="9144000"/>
@@ -128,7 +133,7 @@
 <file path=ppt/charts/chart1.xml><?xml version="1.0" encoding="utf-8"?>
 <c:chartSpace xmlns:c="http://schemas.openxmlformats.org/drawingml/2006/chart" xmlns:a="http://schemas.openxmlformats.org/drawingml/2006/main" xmlns:r="http://schemas.openxmlformats.org/officeDocument/2006/relationships" xmlns:c16r2="http://schemas.microsoft.com/office/drawing/2015/06/chart">
   <c:date1904 val="0"/>
-  <c:lang val="it-IT"/>
+  <c:lang val="en-US"/>
   <c:roundedCorners val="0"/>
   <mc:AlternateContent xmlns:mc="http://schemas.openxmlformats.org/markup-compatibility/2006">
     <mc:Choice xmlns:c14="http://schemas.microsoft.com/office/drawing/2007/8/2/chart" Requires="c14">
@@ -1289,7 +1294,7 @@
           <a:p>
             <a:fld id="{582BBC32-35E8-4D81-A426-2E8D4D9B0A60}" type="slidenum">
               <a:rPr lang="it-IT" smtClean="0"/>
-              <a:t>‹N›</a:t>
+              <a:t>‹#›</a:t>
             </a:fld>
             <a:endParaRPr lang="it-IT"/>
           </a:p>
@@ -1487,7 +1492,7 @@
           <a:p>
             <a:fld id="{582BBC32-35E8-4D81-A426-2E8D4D9B0A60}" type="slidenum">
               <a:rPr lang="it-IT" smtClean="0"/>
-              <a:t>‹N›</a:t>
+              <a:t>‹#›</a:t>
             </a:fld>
             <a:endParaRPr lang="it-IT"/>
           </a:p>
@@ -1695,7 +1700,7 @@
           <a:p>
             <a:fld id="{582BBC32-35E8-4D81-A426-2E8D4D9B0A60}" type="slidenum">
               <a:rPr lang="it-IT" smtClean="0"/>
-              <a:t>‹N›</a:t>
+              <a:t>‹#›</a:t>
             </a:fld>
             <a:endParaRPr lang="it-IT"/>
           </a:p>
@@ -1893,7 +1898,7 @@
           <a:p>
             <a:fld id="{582BBC32-35E8-4D81-A426-2E8D4D9B0A60}" type="slidenum">
               <a:rPr lang="it-IT" smtClean="0"/>
-              <a:t>‹N›</a:t>
+              <a:t>‹#›</a:t>
             </a:fld>
             <a:endParaRPr lang="it-IT"/>
           </a:p>
@@ -2168,7 +2173,7 @@
           <a:p>
             <a:fld id="{582BBC32-35E8-4D81-A426-2E8D4D9B0A60}" type="slidenum">
               <a:rPr lang="it-IT" smtClean="0"/>
-              <a:t>‹N›</a:t>
+              <a:t>‹#›</a:t>
             </a:fld>
             <a:endParaRPr lang="it-IT"/>
           </a:p>
@@ -2433,7 +2438,7 @@
           <a:p>
             <a:fld id="{582BBC32-35E8-4D81-A426-2E8D4D9B0A60}" type="slidenum">
               <a:rPr lang="it-IT" smtClean="0"/>
-              <a:t>‹N›</a:t>
+              <a:t>‹#›</a:t>
             </a:fld>
             <a:endParaRPr lang="it-IT"/>
           </a:p>
@@ -2845,7 +2850,7 @@
           <a:p>
             <a:fld id="{582BBC32-35E8-4D81-A426-2E8D4D9B0A60}" type="slidenum">
               <a:rPr lang="it-IT" smtClean="0"/>
-              <a:t>‹N›</a:t>
+              <a:t>‹#›</a:t>
             </a:fld>
             <a:endParaRPr lang="it-IT"/>
           </a:p>
@@ -2986,7 +2991,7 @@
           <a:p>
             <a:fld id="{582BBC32-35E8-4D81-A426-2E8D4D9B0A60}" type="slidenum">
               <a:rPr lang="it-IT" smtClean="0"/>
-              <a:t>‹N›</a:t>
+              <a:t>‹#›</a:t>
             </a:fld>
             <a:endParaRPr lang="it-IT"/>
           </a:p>
@@ -3099,7 +3104,7 @@
           <a:p>
             <a:fld id="{582BBC32-35E8-4D81-A426-2E8D4D9B0A60}" type="slidenum">
               <a:rPr lang="it-IT" smtClean="0"/>
-              <a:t>‹N›</a:t>
+              <a:t>‹#›</a:t>
             </a:fld>
             <a:endParaRPr lang="it-IT"/>
           </a:p>
@@ -3410,7 +3415,7 @@
           <a:p>
             <a:fld id="{582BBC32-35E8-4D81-A426-2E8D4D9B0A60}" type="slidenum">
               <a:rPr lang="it-IT" smtClean="0"/>
-              <a:t>‹N›</a:t>
+              <a:t>‹#›</a:t>
             </a:fld>
             <a:endParaRPr lang="it-IT"/>
           </a:p>
@@ -3698,7 +3703,7 @@
           <a:p>
             <a:fld id="{582BBC32-35E8-4D81-A426-2E8D4D9B0A60}" type="slidenum">
               <a:rPr lang="it-IT" smtClean="0"/>
-              <a:t>‹N›</a:t>
+              <a:t>‹#›</a:t>
             </a:fld>
             <a:endParaRPr lang="it-IT"/>
           </a:p>
@@ -3975,7 +3980,7 @@
           <a:p>
             <a:fld id="{582BBC32-35E8-4D81-A426-2E8D4D9B0A60}" type="slidenum">
               <a:rPr lang="it-IT" smtClean="0"/>
-              <a:t>‹N›</a:t>
+              <a:t>‹#›</a:t>
             </a:fld>
             <a:endParaRPr lang="it-IT"/>
           </a:p>
@@ -8084,6 +8089,1771 @@
 </p:sld>
 </file>
 
+<file path=ppt/slides/slide15.xml><?xml version="1.0" encoding="utf-8"?>
+<p:sld xmlns:a="http://schemas.openxmlformats.org/drawingml/2006/main" xmlns:r="http://schemas.openxmlformats.org/officeDocument/2006/relationships" xmlns:p="http://schemas.openxmlformats.org/presentationml/2006/main">
+  <p:cSld>
+    <p:spTree>
+      <p:nvGrpSpPr>
+        <p:cNvPr id="1" name=""/>
+        <p:cNvGrpSpPr/>
+        <p:nvPr/>
+      </p:nvGrpSpPr>
+      <p:grpSpPr>
+        <a:xfrm>
+          <a:off x="0" y="0"/>
+          <a:ext cx="0" cy="0"/>
+          <a:chOff x="0" y="0"/>
+          <a:chExt cx="0" cy="0"/>
+        </a:xfrm>
+      </p:grpSpPr>
+      <p:sp>
+        <p:nvSpPr>
+          <p:cNvPr id="2" name="Title 1">
+            <a:extLst>
+              <a:ext uri="{FF2B5EF4-FFF2-40B4-BE49-F238E27FC236}">
+                <a16:creationId xmlns:a16="http://schemas.microsoft.com/office/drawing/2014/main" id="{D745803A-DC0A-C002-264E-183FE5D8AD0E}"/>
+              </a:ext>
+            </a:extLst>
+          </p:cNvPr>
+          <p:cNvSpPr>
+            <a:spLocks noGrp="1"/>
+          </p:cNvSpPr>
+          <p:nvPr>
+            <p:ph type="title"/>
+          </p:nvPr>
+        </p:nvSpPr>
+        <p:spPr/>
+        <p:txBody>
+          <a:bodyPr/>
+          <a:lstStyle/>
+          <a:p>
+            <a:r>
+              <a:rPr lang="it-IT" dirty="0" err="1"/>
+              <a:t>Indigolog</a:t>
+            </a:r>
+            <a:endParaRPr lang="en-US" dirty="0"/>
+          </a:p>
+        </p:txBody>
+      </p:sp>
+      <p:sp>
+        <p:nvSpPr>
+          <p:cNvPr id="3" name="Content Placeholder 2">
+            <a:extLst>
+              <a:ext uri="{FF2B5EF4-FFF2-40B4-BE49-F238E27FC236}">
+                <a16:creationId xmlns:a16="http://schemas.microsoft.com/office/drawing/2014/main" id="{93B31DE7-CC80-6D7E-8C6D-D1FDD8A7D4EF}"/>
+              </a:ext>
+            </a:extLst>
+          </p:cNvPr>
+          <p:cNvSpPr>
+            <a:spLocks noGrp="1"/>
+          </p:cNvSpPr>
+          <p:nvPr>
+            <p:ph idx="1"/>
+          </p:nvPr>
+        </p:nvSpPr>
+        <p:spPr/>
+        <p:txBody>
+          <a:bodyPr/>
+          <a:lstStyle/>
+          <a:p>
+            <a:pPr marL="0" indent="0">
+              <a:buNone/>
+            </a:pPr>
+            <a:r>
+              <a:rPr lang="it-IT" dirty="0"/>
+              <a:t>For </a:t>
+            </a:r>
+            <a:r>
+              <a:rPr lang="it-IT" dirty="0" err="1"/>
+              <a:t>performing</a:t>
+            </a:r>
+            <a:r>
+              <a:rPr lang="it-IT" dirty="0"/>
+              <a:t> the </a:t>
+            </a:r>
+            <a:r>
+              <a:rPr lang="it-IT" dirty="0" err="1"/>
+              <a:t>reasoning</a:t>
+            </a:r>
+            <a:r>
+              <a:rPr lang="it-IT" dirty="0"/>
+              <a:t> task with </a:t>
+            </a:r>
+            <a:r>
+              <a:rPr lang="it-IT" dirty="0" err="1"/>
+              <a:t>indigolog</a:t>
+            </a:r>
+            <a:r>
+              <a:rPr lang="it-IT" dirty="0"/>
+              <a:t>, </a:t>
+            </a:r>
+            <a:r>
+              <a:rPr lang="it-IT" dirty="0" err="1"/>
+              <a:t>we</a:t>
+            </a:r>
+            <a:r>
+              <a:rPr lang="it-IT" dirty="0"/>
+              <a:t> </a:t>
+            </a:r>
+            <a:r>
+              <a:rPr lang="it-IT" dirty="0" err="1"/>
+              <a:t>simplified</a:t>
+            </a:r>
+            <a:r>
+              <a:rPr lang="it-IT" dirty="0"/>
+              <a:t> the domain by </a:t>
+            </a:r>
+            <a:r>
+              <a:rPr lang="it-IT" dirty="0" err="1"/>
+              <a:t>using</a:t>
+            </a:r>
+            <a:r>
+              <a:rPr lang="it-IT" dirty="0"/>
+              <a:t> the </a:t>
+            </a:r>
+            <a:r>
+              <a:rPr lang="it-IT" dirty="0" err="1"/>
+              <a:t>map</a:t>
+            </a:r>
+            <a:r>
+              <a:rPr lang="it-IT" dirty="0"/>
+              <a:t> of the first </a:t>
+            </a:r>
+            <a:r>
+              <a:rPr lang="it-IT" dirty="0" err="1"/>
+              <a:t>problem</a:t>
+            </a:r>
+            <a:r>
+              <a:rPr lang="it-IT" dirty="0"/>
+              <a:t>, </a:t>
+            </a:r>
+            <a:r>
+              <a:rPr lang="it-IT" dirty="0" err="1"/>
+              <a:t>removing</a:t>
+            </a:r>
+            <a:r>
+              <a:rPr lang="it-IT" dirty="0"/>
+              <a:t> </a:t>
+            </a:r>
+            <a:r>
+              <a:rPr lang="it-IT" dirty="0" err="1"/>
+              <a:t>thepossibility</a:t>
+            </a:r>
+            <a:r>
+              <a:rPr lang="it-IT" dirty="0"/>
+              <a:t> of </a:t>
+            </a:r>
+            <a:r>
+              <a:rPr lang="it-IT" dirty="0" err="1"/>
+              <a:t>traffic</a:t>
+            </a:r>
+            <a:r>
+              <a:rPr lang="it-IT" dirty="0"/>
+              <a:t> </a:t>
+            </a:r>
+            <a:r>
+              <a:rPr lang="it-IT" dirty="0" err="1"/>
+              <a:t>lights</a:t>
+            </a:r>
+            <a:r>
+              <a:rPr lang="it-IT" dirty="0"/>
+              <a:t> and </a:t>
+            </a:r>
+            <a:r>
+              <a:rPr lang="it-IT" dirty="0" err="1"/>
+              <a:t>congested</a:t>
+            </a:r>
+            <a:r>
+              <a:rPr lang="it-IT" dirty="0"/>
+              <a:t> locations.</a:t>
+            </a:r>
+          </a:p>
+          <a:p>
+            <a:pPr marL="0" indent="0">
+              <a:buNone/>
+            </a:pPr>
+            <a:r>
+              <a:rPr lang="it-IT" dirty="0" err="1"/>
+              <a:t>We</a:t>
+            </a:r>
+            <a:r>
+              <a:rPr lang="it-IT" dirty="0"/>
+              <a:t> </a:t>
+            </a:r>
+            <a:r>
+              <a:rPr lang="it-IT" dirty="0" err="1"/>
+              <a:t>implemented</a:t>
+            </a:r>
+            <a:r>
+              <a:rPr lang="it-IT" dirty="0"/>
+              <a:t> 2 </a:t>
+            </a:r>
+            <a:r>
+              <a:rPr lang="it-IT" dirty="0" err="1"/>
+              <a:t>exogenous</a:t>
+            </a:r>
+            <a:r>
+              <a:rPr lang="it-IT" dirty="0"/>
+              <a:t> actions and </a:t>
+            </a:r>
+            <a:r>
+              <a:rPr lang="it-IT" dirty="0" err="1"/>
+              <a:t>we</a:t>
+            </a:r>
+            <a:r>
+              <a:rPr lang="it-IT" dirty="0"/>
+              <a:t> </a:t>
+            </a:r>
+            <a:r>
+              <a:rPr lang="it-IT" dirty="0" err="1"/>
+              <a:t>studied</a:t>
+            </a:r>
+            <a:r>
+              <a:rPr lang="it-IT" dirty="0"/>
+              <a:t> the </a:t>
+            </a:r>
+            <a:r>
+              <a:rPr lang="it-IT" dirty="0" err="1"/>
+              <a:t>behavior</a:t>
+            </a:r>
+            <a:r>
+              <a:rPr lang="it-IT" dirty="0"/>
+              <a:t> of </a:t>
+            </a:r>
+            <a:r>
+              <a:rPr lang="it-IT" dirty="0" err="1"/>
+              <a:t>our</a:t>
+            </a:r>
+            <a:r>
+              <a:rPr lang="it-IT" dirty="0"/>
+              <a:t> controllers in </a:t>
+            </a:r>
+            <a:r>
+              <a:rPr lang="it-IT" dirty="0" err="1"/>
+              <a:t>response</a:t>
+            </a:r>
+            <a:r>
+              <a:rPr lang="it-IT" dirty="0"/>
+              <a:t> to </a:t>
+            </a:r>
+            <a:r>
+              <a:rPr lang="it-IT" dirty="0" err="1"/>
+              <a:t>them</a:t>
+            </a:r>
+            <a:r>
+              <a:rPr lang="it-IT" dirty="0"/>
+              <a:t>.</a:t>
+            </a:r>
+            <a:endParaRPr lang="en-US" dirty="0"/>
+          </a:p>
+        </p:txBody>
+      </p:sp>
+    </p:spTree>
+    <p:extLst>
+      <p:ext uri="{BB962C8B-B14F-4D97-AF65-F5344CB8AC3E}">
+        <p14:creationId xmlns:p14="http://schemas.microsoft.com/office/powerpoint/2010/main" val="3306937383"/>
+      </p:ext>
+    </p:extLst>
+  </p:cSld>
+  <p:clrMapOvr>
+    <a:masterClrMapping/>
+  </p:clrMapOvr>
+</p:sld>
+</file>
+
+<file path=ppt/slides/slide16.xml><?xml version="1.0" encoding="utf-8"?>
+<p:sld xmlns:a="http://schemas.openxmlformats.org/drawingml/2006/main" xmlns:r="http://schemas.openxmlformats.org/officeDocument/2006/relationships" xmlns:p="http://schemas.openxmlformats.org/presentationml/2006/main">
+  <p:cSld>
+    <p:spTree>
+      <p:nvGrpSpPr>
+        <p:cNvPr id="1" name=""/>
+        <p:cNvGrpSpPr/>
+        <p:nvPr/>
+      </p:nvGrpSpPr>
+      <p:grpSpPr>
+        <a:xfrm>
+          <a:off x="0" y="0"/>
+          <a:ext cx="0" cy="0"/>
+          <a:chOff x="0" y="0"/>
+          <a:chExt cx="0" cy="0"/>
+        </a:xfrm>
+      </p:grpSpPr>
+      <p:sp>
+        <p:nvSpPr>
+          <p:cNvPr id="2" name="Title 1">
+            <a:extLst>
+              <a:ext uri="{FF2B5EF4-FFF2-40B4-BE49-F238E27FC236}">
+                <a16:creationId xmlns:a16="http://schemas.microsoft.com/office/drawing/2014/main" id="{0E234F09-53C0-E52A-1174-072B9D4F0941}"/>
+              </a:ext>
+            </a:extLst>
+          </p:cNvPr>
+          <p:cNvSpPr>
+            <a:spLocks noGrp="1"/>
+          </p:cNvSpPr>
+          <p:nvPr>
+            <p:ph type="title"/>
+          </p:nvPr>
+        </p:nvSpPr>
+        <p:spPr/>
+        <p:txBody>
+          <a:bodyPr/>
+          <a:lstStyle/>
+          <a:p>
+            <a:r>
+              <a:rPr lang="it-IT" dirty="0" err="1"/>
+              <a:t>Relational</a:t>
+            </a:r>
+            <a:r>
+              <a:rPr lang="it-IT" dirty="0"/>
+              <a:t> and </a:t>
+            </a:r>
+            <a:r>
+              <a:rPr lang="it-IT" dirty="0" err="1"/>
+              <a:t>functional</a:t>
+            </a:r>
+            <a:r>
+              <a:rPr lang="it-IT" dirty="0"/>
+              <a:t> </a:t>
+            </a:r>
+            <a:r>
+              <a:rPr lang="it-IT" dirty="0" err="1"/>
+              <a:t>fluents</a:t>
+            </a:r>
+            <a:endParaRPr lang="en-US" dirty="0"/>
+          </a:p>
+        </p:txBody>
+      </p:sp>
+      <p:sp>
+        <p:nvSpPr>
+          <p:cNvPr id="3" name="Content Placeholder 2">
+            <a:extLst>
+              <a:ext uri="{FF2B5EF4-FFF2-40B4-BE49-F238E27FC236}">
+                <a16:creationId xmlns:a16="http://schemas.microsoft.com/office/drawing/2014/main" id="{D85E9DB7-61C2-C165-2FB5-64E93334C604}"/>
+              </a:ext>
+            </a:extLst>
+          </p:cNvPr>
+          <p:cNvSpPr>
+            <a:spLocks noGrp="1"/>
+          </p:cNvSpPr>
+          <p:nvPr>
+            <p:ph idx="1"/>
+          </p:nvPr>
+        </p:nvSpPr>
+        <p:spPr/>
+        <p:txBody>
+          <a:bodyPr numCol="2">
+            <a:normAutofit fontScale="55000" lnSpcReduction="20000"/>
+          </a:bodyPr>
+          <a:lstStyle/>
+          <a:p>
+            <a:r>
+              <a:rPr lang="en-US" dirty="0" err="1"/>
+              <a:t>taxi_at</a:t>
+            </a:r>
+            <a:endParaRPr lang="en-US" dirty="0"/>
+          </a:p>
+          <a:p>
+            <a:pPr marL="0" indent="0">
+              <a:buNone/>
+            </a:pPr>
+            <a:r>
+              <a:rPr lang="en-US" dirty="0" err="1"/>
+              <a:t>rel_fluent</a:t>
+            </a:r>
+            <a:r>
+              <a:rPr lang="en-US" dirty="0"/>
+              <a:t>(</a:t>
+            </a:r>
+            <a:r>
+              <a:rPr lang="en-US" dirty="0" err="1"/>
+              <a:t>taxi_at</a:t>
+            </a:r>
+            <a:r>
+              <a:rPr lang="en-US" dirty="0"/>
+              <a:t>(L)) :- location(L).</a:t>
+            </a:r>
+          </a:p>
+          <a:p>
+            <a:pPr marL="0" indent="0">
+              <a:buNone/>
+            </a:pPr>
+            <a:r>
+              <a:rPr lang="en-US" dirty="0" err="1"/>
+              <a:t>causes_true</a:t>
+            </a:r>
+            <a:r>
+              <a:rPr lang="en-US" dirty="0"/>
+              <a:t>(move(_, L2),  </a:t>
+            </a:r>
+            <a:r>
+              <a:rPr lang="en-US" dirty="0" err="1"/>
+              <a:t>taxi_at</a:t>
+            </a:r>
+            <a:r>
+              <a:rPr lang="en-US" dirty="0"/>
+              <a:t>(L2), true).</a:t>
+            </a:r>
+          </a:p>
+          <a:p>
+            <a:pPr marL="0" indent="0">
+              <a:buNone/>
+            </a:pPr>
+            <a:r>
+              <a:rPr lang="en-US" dirty="0" err="1"/>
+              <a:t>causes_false</a:t>
+            </a:r>
+            <a:r>
+              <a:rPr lang="en-US" dirty="0"/>
+              <a:t>(move(L1, _), </a:t>
+            </a:r>
+            <a:r>
+              <a:rPr lang="en-US" dirty="0" err="1"/>
+              <a:t>taxi_at</a:t>
+            </a:r>
+            <a:r>
+              <a:rPr lang="en-US" dirty="0"/>
+              <a:t>(L1), true).</a:t>
+            </a:r>
+          </a:p>
+          <a:p>
+            <a:pPr marL="0" indent="0">
+              <a:buNone/>
+            </a:pPr>
+            <a:endParaRPr lang="en-US" dirty="0"/>
+          </a:p>
+          <a:p>
+            <a:r>
+              <a:rPr lang="en-US" dirty="0"/>
+              <a:t>congested</a:t>
+            </a:r>
+          </a:p>
+          <a:p>
+            <a:pPr marL="0" indent="0">
+              <a:buNone/>
+            </a:pPr>
+            <a:r>
+              <a:rPr lang="en-US" dirty="0" err="1"/>
+              <a:t>rel_fluent</a:t>
+            </a:r>
+            <a:r>
+              <a:rPr lang="en-US" dirty="0"/>
+              <a:t>(congested(L)) :- location(L).</a:t>
+            </a:r>
+          </a:p>
+          <a:p>
+            <a:pPr marL="0" indent="0">
+              <a:buNone/>
+            </a:pPr>
+            <a:br>
+              <a:rPr lang="en-US" dirty="0"/>
+            </a:br>
+            <a:endParaRPr lang="en-US" dirty="0"/>
+          </a:p>
+          <a:p>
+            <a:pPr marL="0" indent="0">
+              <a:buNone/>
+            </a:pPr>
+            <a:endParaRPr lang="en-US" dirty="0"/>
+          </a:p>
+          <a:p>
+            <a:r>
+              <a:rPr lang="en-US" dirty="0" err="1"/>
+              <a:t>on_taxi</a:t>
+            </a:r>
+            <a:endParaRPr lang="en-US" dirty="0"/>
+          </a:p>
+          <a:p>
+            <a:pPr marL="0" indent="0">
+              <a:buNone/>
+            </a:pPr>
+            <a:r>
+              <a:rPr lang="en-US" dirty="0" err="1"/>
+              <a:t>rel_fluent</a:t>
+            </a:r>
+            <a:r>
+              <a:rPr lang="en-US" dirty="0"/>
+              <a:t>(</a:t>
+            </a:r>
+            <a:r>
+              <a:rPr lang="en-US" dirty="0" err="1"/>
+              <a:t>on_taxi</a:t>
+            </a:r>
+            <a:r>
+              <a:rPr lang="en-US" dirty="0"/>
+              <a:t>(P)) :- passenger(P).</a:t>
+            </a:r>
+          </a:p>
+          <a:p>
+            <a:pPr marL="0" indent="0">
+              <a:buNone/>
+            </a:pPr>
+            <a:r>
+              <a:rPr lang="en-US" dirty="0" err="1"/>
+              <a:t>causes_true</a:t>
+            </a:r>
+            <a:r>
+              <a:rPr lang="en-US" dirty="0"/>
+              <a:t>(</a:t>
+            </a:r>
+            <a:r>
+              <a:rPr lang="en-US" dirty="0" err="1"/>
+              <a:t>pickUp</a:t>
+            </a:r>
+            <a:r>
+              <a:rPr lang="en-US" dirty="0"/>
+              <a:t>(P, _),  </a:t>
+            </a:r>
+            <a:r>
+              <a:rPr lang="en-US" dirty="0" err="1"/>
+              <a:t>on_taxi</a:t>
+            </a:r>
+            <a:r>
+              <a:rPr lang="en-US" dirty="0"/>
+              <a:t>(P), true).</a:t>
+            </a:r>
+          </a:p>
+          <a:p>
+            <a:pPr marL="0" indent="0">
+              <a:buNone/>
+            </a:pPr>
+            <a:r>
+              <a:rPr lang="en-US" dirty="0" err="1"/>
+              <a:t>causes_false</a:t>
+            </a:r>
+            <a:r>
+              <a:rPr lang="en-US" dirty="0"/>
+              <a:t>(</a:t>
+            </a:r>
+            <a:r>
+              <a:rPr lang="en-US" dirty="0" err="1"/>
+              <a:t>getOff</a:t>
+            </a:r>
+            <a:r>
+              <a:rPr lang="en-US" dirty="0"/>
+              <a:t>(P, _), </a:t>
+            </a:r>
+            <a:r>
+              <a:rPr lang="en-US" dirty="0" err="1"/>
+              <a:t>on_taxi</a:t>
+            </a:r>
+            <a:r>
+              <a:rPr lang="en-US" dirty="0"/>
+              <a:t>(P), true).</a:t>
+            </a:r>
+          </a:p>
+          <a:p>
+            <a:pPr marL="0" indent="0">
+              <a:buNone/>
+            </a:pPr>
+            <a:endParaRPr lang="en-US" dirty="0"/>
+          </a:p>
+          <a:p>
+            <a:r>
+              <a:rPr lang="en-US" dirty="0" err="1"/>
+              <a:t>request_to</a:t>
+            </a:r>
+            <a:endParaRPr lang="en-US" dirty="0"/>
+          </a:p>
+          <a:p>
+            <a:pPr marL="0" indent="0">
+              <a:buNone/>
+            </a:pPr>
+            <a:r>
+              <a:rPr lang="en-US" dirty="0" err="1"/>
+              <a:t>rel_fluent</a:t>
+            </a:r>
+            <a:r>
+              <a:rPr lang="en-US" dirty="0"/>
+              <a:t>(</a:t>
+            </a:r>
+            <a:r>
+              <a:rPr lang="en-US" dirty="0" err="1"/>
+              <a:t>request_to</a:t>
+            </a:r>
+            <a:r>
+              <a:rPr lang="en-US" dirty="0"/>
+              <a:t>(P, L)) :- passenger(P), location(L).</a:t>
+            </a:r>
+          </a:p>
+          <a:p>
+            <a:pPr marL="0" indent="0">
+              <a:buNone/>
+            </a:pPr>
+            <a:r>
+              <a:rPr lang="en-US" dirty="0" err="1"/>
+              <a:t>causes_false</a:t>
+            </a:r>
+            <a:r>
+              <a:rPr lang="en-US" dirty="0"/>
+              <a:t>(</a:t>
+            </a:r>
+            <a:r>
+              <a:rPr lang="en-US" dirty="0" err="1"/>
+              <a:t>getOff</a:t>
+            </a:r>
+            <a:r>
+              <a:rPr lang="en-US" dirty="0"/>
+              <a:t>(P, L), </a:t>
+            </a:r>
+            <a:r>
+              <a:rPr lang="en-US" dirty="0" err="1"/>
+              <a:t>request_to</a:t>
+            </a:r>
+            <a:r>
+              <a:rPr lang="en-US" dirty="0"/>
+              <a:t>(P, L), true).</a:t>
+            </a:r>
+          </a:p>
+          <a:p>
+            <a:pPr marL="0" indent="0">
+              <a:buNone/>
+            </a:pPr>
+            <a:endParaRPr lang="en-US" dirty="0"/>
+          </a:p>
+          <a:p>
+            <a:pPr marL="0" indent="0">
+              <a:buNone/>
+            </a:pPr>
+            <a:endParaRPr lang="en-US" dirty="0"/>
+          </a:p>
+          <a:p>
+            <a:r>
+              <a:rPr lang="en-US" dirty="0" err="1"/>
+              <a:t>battery_level</a:t>
+            </a:r>
+            <a:endParaRPr lang="en-US" dirty="0"/>
+          </a:p>
+          <a:p>
+            <a:pPr marL="0" indent="0">
+              <a:buNone/>
+            </a:pPr>
+            <a:r>
+              <a:rPr lang="en-US" dirty="0" err="1"/>
+              <a:t>fun_fluent</a:t>
+            </a:r>
+            <a:r>
+              <a:rPr lang="en-US" dirty="0"/>
+              <a:t>(</a:t>
+            </a:r>
+            <a:r>
+              <a:rPr lang="en-US" dirty="0" err="1"/>
+              <a:t>battery_level</a:t>
+            </a:r>
+            <a:r>
+              <a:rPr lang="en-US" dirty="0"/>
+              <a:t>).</a:t>
+            </a:r>
+          </a:p>
+          <a:p>
+            <a:pPr marL="0" indent="0">
+              <a:buNone/>
+            </a:pPr>
+            <a:r>
+              <a:rPr lang="en-US" dirty="0" err="1"/>
+              <a:t>causes_val</a:t>
+            </a:r>
+            <a:r>
+              <a:rPr lang="en-US" dirty="0"/>
+              <a:t>(recharge(_), </a:t>
+            </a:r>
+            <a:r>
+              <a:rPr lang="en-US" dirty="0" err="1"/>
+              <a:t>battery_level</a:t>
+            </a:r>
+            <a:r>
+              <a:rPr lang="en-US" dirty="0"/>
+              <a:t>, 100, true).</a:t>
+            </a:r>
+          </a:p>
+          <a:p>
+            <a:pPr marL="0" indent="0">
+              <a:buNone/>
+            </a:pPr>
+            <a:endParaRPr lang="en-US" dirty="0"/>
+          </a:p>
+          <a:p>
+            <a:pPr marL="0" indent="0">
+              <a:buNone/>
+            </a:pPr>
+            <a:endParaRPr lang="en-US" dirty="0"/>
+          </a:p>
+          <a:p>
+            <a:r>
+              <a:rPr lang="en-US" dirty="0" err="1"/>
+              <a:t>passenger_at</a:t>
+            </a:r>
+            <a:endParaRPr lang="en-US" dirty="0"/>
+          </a:p>
+          <a:p>
+            <a:pPr marL="0" indent="0">
+              <a:buNone/>
+            </a:pPr>
+            <a:r>
+              <a:rPr lang="en-US" dirty="0" err="1"/>
+              <a:t>rel_fluent</a:t>
+            </a:r>
+            <a:r>
+              <a:rPr lang="en-US" dirty="0"/>
+              <a:t>(</a:t>
+            </a:r>
+            <a:r>
+              <a:rPr lang="en-US" dirty="0" err="1"/>
+              <a:t>passenger_at</a:t>
+            </a:r>
+            <a:r>
+              <a:rPr lang="en-US" dirty="0"/>
+              <a:t>(P, L)) :- passenger(P), location(L).</a:t>
+            </a:r>
+          </a:p>
+          <a:p>
+            <a:pPr marL="0" indent="0">
+              <a:buNone/>
+            </a:pPr>
+            <a:r>
+              <a:rPr lang="en-US" dirty="0" err="1"/>
+              <a:t>causes_false</a:t>
+            </a:r>
+            <a:r>
+              <a:rPr lang="en-US" dirty="0"/>
+              <a:t>(</a:t>
+            </a:r>
+            <a:r>
+              <a:rPr lang="en-US" dirty="0" err="1"/>
+              <a:t>pickUp</a:t>
+            </a:r>
+            <a:r>
+              <a:rPr lang="en-US" dirty="0"/>
+              <a:t>(P, L), </a:t>
+            </a:r>
+            <a:r>
+              <a:rPr lang="en-US" dirty="0" err="1"/>
+              <a:t>passenger_at</a:t>
+            </a:r>
+            <a:r>
+              <a:rPr lang="en-US" dirty="0"/>
+              <a:t>(P, L), true).</a:t>
+            </a:r>
+          </a:p>
+          <a:p>
+            <a:pPr marL="0" indent="0">
+              <a:buNone/>
+            </a:pPr>
+            <a:r>
+              <a:rPr lang="en-US" dirty="0" err="1"/>
+              <a:t>causes_true</a:t>
+            </a:r>
+            <a:r>
+              <a:rPr lang="en-US" dirty="0"/>
+              <a:t>(</a:t>
+            </a:r>
+            <a:r>
+              <a:rPr lang="en-US" dirty="0" err="1"/>
+              <a:t>getOff</a:t>
+            </a:r>
+            <a:r>
+              <a:rPr lang="en-US" dirty="0"/>
+              <a:t>(P, L), </a:t>
+            </a:r>
+            <a:r>
+              <a:rPr lang="en-US" dirty="0" err="1"/>
+              <a:t>passenger_at</a:t>
+            </a:r>
+            <a:r>
+              <a:rPr lang="en-US" dirty="0"/>
+              <a:t>(P, L), true).</a:t>
+            </a:r>
+          </a:p>
+          <a:p>
+            <a:pPr marL="0" indent="0">
+              <a:buNone/>
+            </a:pPr>
+            <a:endParaRPr lang="en-US" dirty="0"/>
+          </a:p>
+        </p:txBody>
+      </p:sp>
+    </p:spTree>
+    <p:extLst>
+      <p:ext uri="{BB962C8B-B14F-4D97-AF65-F5344CB8AC3E}">
+        <p14:creationId xmlns:p14="http://schemas.microsoft.com/office/powerpoint/2010/main" val="641096884"/>
+      </p:ext>
+    </p:extLst>
+  </p:cSld>
+  <p:clrMapOvr>
+    <a:masterClrMapping/>
+  </p:clrMapOvr>
+</p:sld>
+</file>
+
+<file path=ppt/slides/slide17.xml><?xml version="1.0" encoding="utf-8"?>
+<p:sld xmlns:a="http://schemas.openxmlformats.org/drawingml/2006/main" xmlns:r="http://schemas.openxmlformats.org/officeDocument/2006/relationships" xmlns:p="http://schemas.openxmlformats.org/presentationml/2006/main">
+  <p:cSld>
+    <p:spTree>
+      <p:nvGrpSpPr>
+        <p:cNvPr id="1" name=""/>
+        <p:cNvGrpSpPr/>
+        <p:nvPr/>
+      </p:nvGrpSpPr>
+      <p:grpSpPr>
+        <a:xfrm>
+          <a:off x="0" y="0"/>
+          <a:ext cx="0" cy="0"/>
+          <a:chOff x="0" y="0"/>
+          <a:chExt cx="0" cy="0"/>
+        </a:xfrm>
+      </p:grpSpPr>
+      <p:sp>
+        <p:nvSpPr>
+          <p:cNvPr id="2" name="Title 1">
+            <a:extLst>
+              <a:ext uri="{FF2B5EF4-FFF2-40B4-BE49-F238E27FC236}">
+                <a16:creationId xmlns:a16="http://schemas.microsoft.com/office/drawing/2014/main" id="{D6510F89-554E-580F-ADC1-7ABE730D30FF}"/>
+              </a:ext>
+            </a:extLst>
+          </p:cNvPr>
+          <p:cNvSpPr>
+            <a:spLocks noGrp="1"/>
+          </p:cNvSpPr>
+          <p:nvPr>
+            <p:ph type="title"/>
+          </p:nvPr>
+        </p:nvSpPr>
+        <p:spPr/>
+        <p:txBody>
+          <a:bodyPr/>
+          <a:lstStyle/>
+          <a:p>
+            <a:r>
+              <a:rPr lang="it-IT" dirty="0"/>
+              <a:t>Actions</a:t>
+            </a:r>
+            <a:endParaRPr lang="en-US" dirty="0"/>
+          </a:p>
+        </p:txBody>
+      </p:sp>
+      <p:sp>
+        <p:nvSpPr>
+          <p:cNvPr id="3" name="Content Placeholder 2">
+            <a:extLst>
+              <a:ext uri="{FF2B5EF4-FFF2-40B4-BE49-F238E27FC236}">
+                <a16:creationId xmlns:a16="http://schemas.microsoft.com/office/drawing/2014/main" id="{BA0F7810-45AA-A8B8-80FD-7490FE794620}"/>
+              </a:ext>
+            </a:extLst>
+          </p:cNvPr>
+          <p:cNvSpPr>
+            <a:spLocks noGrp="1"/>
+          </p:cNvSpPr>
+          <p:nvPr>
+            <p:ph idx="1"/>
+          </p:nvPr>
+        </p:nvSpPr>
+        <p:spPr/>
+        <p:txBody>
+          <a:bodyPr numCol="2">
+            <a:normAutofit fontScale="55000" lnSpcReduction="20000"/>
+          </a:bodyPr>
+          <a:lstStyle/>
+          <a:p>
+            <a:r>
+              <a:rPr lang="en-US" dirty="0" err="1"/>
+              <a:t>prim_action</a:t>
+            </a:r>
+            <a:r>
+              <a:rPr lang="en-US" dirty="0"/>
+              <a:t>(move(L1, L2)) :- location(L1), location(L2).</a:t>
+            </a:r>
+          </a:p>
+          <a:p>
+            <a:pPr marL="0" indent="0">
+              <a:buNone/>
+            </a:pPr>
+            <a:r>
+              <a:rPr lang="en-US" dirty="0"/>
+              <a:t>    </a:t>
+            </a:r>
+            <a:r>
+              <a:rPr lang="en-US" dirty="0" err="1"/>
+              <a:t>poss</a:t>
+            </a:r>
+            <a:r>
+              <a:rPr lang="en-US" dirty="0"/>
+              <a:t>(move(L1, L2),</a:t>
+            </a:r>
+          </a:p>
+          <a:p>
+            <a:pPr marL="0" indent="0">
+              <a:buNone/>
+            </a:pPr>
+            <a:r>
+              <a:rPr lang="en-US" dirty="0"/>
+              <a:t>      and(</a:t>
+            </a:r>
+            <a:r>
+              <a:rPr lang="en-US" dirty="0" err="1"/>
+              <a:t>taxi_at</a:t>
+            </a:r>
+            <a:r>
+              <a:rPr lang="en-US" dirty="0"/>
+              <a:t>(L1),</a:t>
+            </a:r>
+          </a:p>
+          <a:p>
+            <a:pPr marL="0" indent="0">
+              <a:buNone/>
+            </a:pPr>
+            <a:r>
+              <a:rPr lang="en-US" dirty="0"/>
+              <a:t>        and(road(L1, L2),</a:t>
+            </a:r>
+          </a:p>
+          <a:p>
+            <a:pPr marL="0" indent="0">
+              <a:buNone/>
+            </a:pPr>
+            <a:r>
+              <a:rPr lang="en-US" dirty="0"/>
+              <a:t>          (</a:t>
+            </a:r>
+            <a:r>
+              <a:rPr lang="en-US" dirty="0" err="1"/>
+              <a:t>battery_level</a:t>
+            </a:r>
+            <a:r>
+              <a:rPr lang="en-US" dirty="0"/>
+              <a:t> &gt; (D * C)))</a:t>
+            </a:r>
+          </a:p>
+          <a:p>
+            <a:pPr marL="0" indent="0">
+              <a:buNone/>
+            </a:pPr>
+            <a:r>
+              <a:rPr lang="en-US" dirty="0"/>
+              <a:t>            )) :- distance(L1, L2, D), </a:t>
+            </a:r>
+            <a:r>
+              <a:rPr lang="en-US" dirty="0" err="1"/>
+              <a:t>cost_per_distance</a:t>
+            </a:r>
+            <a:r>
+              <a:rPr lang="en-US" dirty="0"/>
+              <a:t>(C).</a:t>
+            </a:r>
+          </a:p>
+          <a:p>
+            <a:pPr marL="0" indent="0">
+              <a:buNone/>
+            </a:pPr>
+            <a:br>
+              <a:rPr lang="en-US" dirty="0"/>
+            </a:br>
+            <a:endParaRPr lang="en-US" dirty="0"/>
+          </a:p>
+          <a:p>
+            <a:r>
+              <a:rPr lang="en-US" dirty="0" err="1"/>
+              <a:t>prim_action</a:t>
+            </a:r>
+            <a:r>
+              <a:rPr lang="en-US" dirty="0"/>
+              <a:t>(recharge(L)) :- location(L).</a:t>
+            </a:r>
+          </a:p>
+          <a:p>
+            <a:pPr marL="0" indent="0">
+              <a:buNone/>
+            </a:pPr>
+            <a:r>
+              <a:rPr lang="en-US" dirty="0" err="1"/>
+              <a:t>poss</a:t>
+            </a:r>
+            <a:r>
+              <a:rPr lang="en-US" dirty="0"/>
+              <a:t>(recharge(L),</a:t>
+            </a:r>
+          </a:p>
+          <a:p>
+            <a:pPr marL="0" indent="0">
+              <a:buNone/>
+            </a:pPr>
+            <a:r>
+              <a:rPr lang="en-US" dirty="0"/>
+              <a:t>    and(</a:t>
+            </a:r>
+            <a:r>
+              <a:rPr lang="en-US" dirty="0" err="1"/>
+              <a:t>charge_station</a:t>
+            </a:r>
+            <a:r>
+              <a:rPr lang="en-US" dirty="0"/>
+              <a:t>(L),</a:t>
+            </a:r>
+          </a:p>
+          <a:p>
+            <a:pPr marL="0" indent="0">
+              <a:buNone/>
+            </a:pPr>
+            <a:r>
+              <a:rPr lang="en-US" dirty="0"/>
+              <a:t>    and(</a:t>
+            </a:r>
+            <a:r>
+              <a:rPr lang="en-US" dirty="0" err="1"/>
+              <a:t>taxi_at</a:t>
+            </a:r>
+            <a:r>
+              <a:rPr lang="en-US" dirty="0"/>
+              <a:t>(L),</a:t>
+            </a:r>
+          </a:p>
+          <a:p>
+            <a:pPr marL="0" indent="0">
+              <a:buNone/>
+            </a:pPr>
+            <a:r>
+              <a:rPr lang="en-US" dirty="0"/>
+              <a:t>        </a:t>
+            </a:r>
+            <a:r>
+              <a:rPr lang="en-US" dirty="0" err="1"/>
+              <a:t>battery_level</a:t>
+            </a:r>
+            <a:r>
+              <a:rPr lang="en-US" dirty="0"/>
+              <a:t> &lt; 100))).</a:t>
+            </a:r>
+          </a:p>
+          <a:p>
+            <a:pPr marL="0" indent="0">
+              <a:buNone/>
+            </a:pPr>
+            <a:br>
+              <a:rPr lang="en-US" dirty="0"/>
+            </a:br>
+            <a:endParaRPr lang="en-US" dirty="0"/>
+          </a:p>
+          <a:p>
+            <a:pPr marL="0" indent="0">
+              <a:buNone/>
+            </a:pPr>
+            <a:endParaRPr lang="en-US" dirty="0"/>
+          </a:p>
+          <a:p>
+            <a:r>
+              <a:rPr lang="en-US" dirty="0" err="1"/>
+              <a:t>prim_action</a:t>
+            </a:r>
+            <a:r>
+              <a:rPr lang="en-US" dirty="0"/>
+              <a:t>(</a:t>
+            </a:r>
+            <a:r>
+              <a:rPr lang="en-US" dirty="0" err="1"/>
+              <a:t>pickUp</a:t>
+            </a:r>
+            <a:r>
+              <a:rPr lang="en-US" dirty="0"/>
+              <a:t>(P, L)) :- passenger(P), location(L).</a:t>
+            </a:r>
+          </a:p>
+          <a:p>
+            <a:pPr marL="0" indent="0">
+              <a:buNone/>
+            </a:pPr>
+            <a:r>
+              <a:rPr lang="en-US" dirty="0" err="1"/>
+              <a:t>poss</a:t>
+            </a:r>
+            <a:r>
+              <a:rPr lang="en-US" dirty="0"/>
+              <a:t>(</a:t>
+            </a:r>
+            <a:r>
+              <a:rPr lang="en-US" dirty="0" err="1"/>
+              <a:t>pickUp</a:t>
+            </a:r>
+            <a:r>
+              <a:rPr lang="en-US" dirty="0"/>
+              <a:t>(P, L),</a:t>
+            </a:r>
+          </a:p>
+          <a:p>
+            <a:pPr marL="0" indent="0">
+              <a:buNone/>
+            </a:pPr>
+            <a:r>
+              <a:rPr lang="en-US" dirty="0"/>
+              <a:t>    and(</a:t>
+            </a:r>
+            <a:r>
+              <a:rPr lang="en-US" dirty="0" err="1"/>
+              <a:t>passenger_at</a:t>
+            </a:r>
+            <a:r>
+              <a:rPr lang="en-US" dirty="0"/>
+              <a:t>(P, L),</a:t>
+            </a:r>
+          </a:p>
+          <a:p>
+            <a:pPr marL="0" indent="0">
+              <a:buNone/>
+            </a:pPr>
+            <a:r>
+              <a:rPr lang="en-US" dirty="0"/>
+              <a:t>    and(</a:t>
+            </a:r>
+            <a:r>
+              <a:rPr lang="en-US" dirty="0" err="1"/>
+              <a:t>taxi_at</a:t>
+            </a:r>
+            <a:r>
+              <a:rPr lang="en-US" dirty="0"/>
+              <a:t>(L),</a:t>
+            </a:r>
+          </a:p>
+          <a:p>
+            <a:pPr marL="0" indent="0">
+              <a:buNone/>
+            </a:pPr>
+            <a:r>
+              <a:rPr lang="en-US" dirty="0"/>
+              <a:t>        neg(some(j, </a:t>
+            </a:r>
+            <a:r>
+              <a:rPr lang="en-US" dirty="0" err="1"/>
+              <a:t>on_taxi</a:t>
+            </a:r>
+            <a:r>
+              <a:rPr lang="en-US" dirty="0"/>
+              <a:t>(j)))))).</a:t>
+            </a:r>
+          </a:p>
+          <a:p>
+            <a:pPr marL="0" indent="0">
+              <a:buNone/>
+            </a:pPr>
+            <a:br>
+              <a:rPr lang="en-US" dirty="0"/>
+            </a:br>
+            <a:endParaRPr lang="en-US" dirty="0"/>
+          </a:p>
+          <a:p>
+            <a:r>
+              <a:rPr lang="en-US" dirty="0" err="1"/>
+              <a:t>prim_action</a:t>
+            </a:r>
+            <a:r>
+              <a:rPr lang="en-US" dirty="0"/>
+              <a:t>(</a:t>
+            </a:r>
+            <a:r>
+              <a:rPr lang="en-US" dirty="0" err="1"/>
+              <a:t>getOff</a:t>
+            </a:r>
+            <a:r>
+              <a:rPr lang="en-US" dirty="0"/>
+              <a:t>(P, L)) :- passenger(P), location(L).</a:t>
+            </a:r>
+          </a:p>
+          <a:p>
+            <a:pPr marL="0" indent="0">
+              <a:buNone/>
+            </a:pPr>
+            <a:r>
+              <a:rPr lang="en-US" dirty="0" err="1"/>
+              <a:t>poss</a:t>
+            </a:r>
+            <a:r>
+              <a:rPr lang="en-US" dirty="0"/>
+              <a:t>(</a:t>
+            </a:r>
+            <a:r>
+              <a:rPr lang="en-US" dirty="0" err="1"/>
+              <a:t>getOff</a:t>
+            </a:r>
+            <a:r>
+              <a:rPr lang="en-US" dirty="0"/>
+              <a:t>(P, L),</a:t>
+            </a:r>
+          </a:p>
+          <a:p>
+            <a:pPr marL="0" indent="0">
+              <a:buNone/>
+            </a:pPr>
+            <a:r>
+              <a:rPr lang="en-US" dirty="0"/>
+              <a:t>    and(</a:t>
+            </a:r>
+            <a:r>
+              <a:rPr lang="en-US" dirty="0" err="1"/>
+              <a:t>on_taxi</a:t>
+            </a:r>
+            <a:r>
+              <a:rPr lang="en-US" dirty="0"/>
+              <a:t>(P),</a:t>
+            </a:r>
+          </a:p>
+          <a:p>
+            <a:pPr marL="0" indent="0">
+              <a:buNone/>
+            </a:pPr>
+            <a:r>
+              <a:rPr lang="en-US" dirty="0"/>
+              <a:t>    and(</a:t>
+            </a:r>
+            <a:r>
+              <a:rPr lang="en-US" dirty="0" err="1"/>
+              <a:t>taxi_at</a:t>
+            </a:r>
+            <a:r>
+              <a:rPr lang="en-US" dirty="0"/>
+              <a:t>(L),</a:t>
+            </a:r>
+          </a:p>
+          <a:p>
+            <a:pPr marL="0" indent="0">
+              <a:buNone/>
+            </a:pPr>
+            <a:r>
+              <a:rPr lang="en-US" dirty="0"/>
+              <a:t>        </a:t>
+            </a:r>
+            <a:r>
+              <a:rPr lang="en-US" dirty="0" err="1"/>
+              <a:t>request_to</a:t>
+            </a:r>
+            <a:r>
+              <a:rPr lang="en-US" dirty="0"/>
+              <a:t>(P, L)))).</a:t>
+            </a:r>
+            <a:br>
+              <a:rPr lang="en-US" dirty="0"/>
+            </a:br>
+            <a:endParaRPr lang="en-US" dirty="0"/>
+          </a:p>
+          <a:p>
+            <a:endParaRPr lang="en-US" dirty="0"/>
+          </a:p>
+        </p:txBody>
+      </p:sp>
+    </p:spTree>
+    <p:extLst>
+      <p:ext uri="{BB962C8B-B14F-4D97-AF65-F5344CB8AC3E}">
+        <p14:creationId xmlns:p14="http://schemas.microsoft.com/office/powerpoint/2010/main" val="1920110908"/>
+      </p:ext>
+    </p:extLst>
+  </p:cSld>
+  <p:clrMapOvr>
+    <a:masterClrMapping/>
+  </p:clrMapOvr>
+</p:sld>
+</file>
+
+<file path=ppt/slides/slide18.xml><?xml version="1.0" encoding="utf-8"?>
+<p:sld xmlns:a="http://schemas.openxmlformats.org/drawingml/2006/main" xmlns:r="http://schemas.openxmlformats.org/officeDocument/2006/relationships" xmlns:p="http://schemas.openxmlformats.org/presentationml/2006/main">
+  <p:cSld>
+    <p:spTree>
+      <p:nvGrpSpPr>
+        <p:cNvPr id="1" name=""/>
+        <p:cNvGrpSpPr/>
+        <p:nvPr/>
+      </p:nvGrpSpPr>
+      <p:grpSpPr>
+        <a:xfrm>
+          <a:off x="0" y="0"/>
+          <a:ext cx="0" cy="0"/>
+          <a:chOff x="0" y="0"/>
+          <a:chExt cx="0" cy="0"/>
+        </a:xfrm>
+      </p:grpSpPr>
+      <p:sp>
+        <p:nvSpPr>
+          <p:cNvPr id="2" name="Title 1">
+            <a:extLst>
+              <a:ext uri="{FF2B5EF4-FFF2-40B4-BE49-F238E27FC236}">
+                <a16:creationId xmlns:a16="http://schemas.microsoft.com/office/drawing/2014/main" id="{1CECFB86-5FFD-8A24-EF6B-099652354CC7}"/>
+              </a:ext>
+            </a:extLst>
+          </p:cNvPr>
+          <p:cNvSpPr>
+            <a:spLocks noGrp="1"/>
+          </p:cNvSpPr>
+          <p:nvPr>
+            <p:ph type="title"/>
+          </p:nvPr>
+        </p:nvSpPr>
+        <p:spPr/>
+        <p:txBody>
+          <a:bodyPr/>
+          <a:lstStyle/>
+          <a:p>
+            <a:r>
+              <a:rPr lang="it-IT" dirty="0" err="1"/>
+              <a:t>Exogenous</a:t>
+            </a:r>
+            <a:r>
+              <a:rPr lang="it-IT" dirty="0"/>
+              <a:t> actions</a:t>
+            </a:r>
+            <a:endParaRPr lang="en-US" dirty="0"/>
+          </a:p>
+        </p:txBody>
+      </p:sp>
+      <p:sp>
+        <p:nvSpPr>
+          <p:cNvPr id="3" name="Content Placeholder 2">
+            <a:extLst>
+              <a:ext uri="{FF2B5EF4-FFF2-40B4-BE49-F238E27FC236}">
+                <a16:creationId xmlns:a16="http://schemas.microsoft.com/office/drawing/2014/main" id="{640D1C17-3036-E326-7CEB-B38D2D6F554B}"/>
+              </a:ext>
+            </a:extLst>
+          </p:cNvPr>
+          <p:cNvSpPr>
+            <a:spLocks noGrp="1"/>
+          </p:cNvSpPr>
+          <p:nvPr>
+            <p:ph idx="1"/>
+          </p:nvPr>
+        </p:nvSpPr>
+        <p:spPr/>
+        <p:txBody>
+          <a:bodyPr/>
+          <a:lstStyle/>
+          <a:p>
+            <a:pPr marL="0" indent="0">
+              <a:buNone/>
+            </a:pPr>
+            <a:r>
+              <a:rPr lang="it-IT" dirty="0" err="1"/>
+              <a:t>We</a:t>
+            </a:r>
+            <a:r>
+              <a:rPr lang="it-IT" dirty="0"/>
+              <a:t> </a:t>
+            </a:r>
+            <a:r>
+              <a:rPr lang="it-IT" dirty="0" err="1"/>
+              <a:t>added</a:t>
+            </a:r>
+            <a:r>
+              <a:rPr lang="it-IT" dirty="0"/>
+              <a:t> </a:t>
+            </a:r>
+            <a:r>
+              <a:rPr lang="it-IT" dirty="0" err="1"/>
+              <a:t>three</a:t>
+            </a:r>
+            <a:r>
+              <a:rPr lang="it-IT" dirty="0"/>
+              <a:t> </a:t>
+            </a:r>
+            <a:r>
+              <a:rPr lang="it-IT" dirty="0" err="1"/>
+              <a:t>exogenous</a:t>
+            </a:r>
+            <a:r>
+              <a:rPr lang="it-IT" dirty="0"/>
+              <a:t> actions to test </a:t>
+            </a:r>
+            <a:r>
+              <a:rPr lang="it-IT" dirty="0" err="1"/>
+              <a:t>our</a:t>
+            </a:r>
+            <a:r>
+              <a:rPr lang="it-IT" dirty="0"/>
+              <a:t> </a:t>
+            </a:r>
+            <a:r>
+              <a:rPr lang="it-IT" dirty="0" err="1"/>
+              <a:t>reactive</a:t>
+            </a:r>
+            <a:r>
+              <a:rPr lang="it-IT" dirty="0"/>
+              <a:t> controller:</a:t>
+            </a:r>
+          </a:p>
+          <a:p>
+            <a:r>
+              <a:rPr lang="it-IT" dirty="0" err="1"/>
+              <a:t>move_p</a:t>
+            </a:r>
+            <a:r>
+              <a:rPr lang="it-IT" dirty="0"/>
+              <a:t>: </a:t>
+            </a:r>
+            <a:r>
+              <a:rPr lang="it-IT" dirty="0" err="1"/>
+              <a:t>moves</a:t>
+            </a:r>
+            <a:r>
+              <a:rPr lang="it-IT" dirty="0"/>
+              <a:t> a </a:t>
+            </a:r>
+            <a:r>
+              <a:rPr lang="it-IT" dirty="0" err="1"/>
+              <a:t>passenger</a:t>
+            </a:r>
+            <a:r>
+              <a:rPr lang="it-IT" dirty="0"/>
+              <a:t> from </a:t>
+            </a:r>
+            <a:r>
+              <a:rPr lang="it-IT" dirty="0" err="1"/>
+              <a:t>its</a:t>
+            </a:r>
+            <a:r>
+              <a:rPr lang="it-IT" dirty="0"/>
+              <a:t> location to </a:t>
+            </a:r>
+            <a:r>
+              <a:rPr lang="it-IT" dirty="0" err="1"/>
+              <a:t>another</a:t>
+            </a:r>
+            <a:r>
+              <a:rPr lang="it-IT" dirty="0"/>
+              <a:t>.</a:t>
+            </a:r>
+          </a:p>
+          <a:p>
+            <a:r>
+              <a:rPr lang="it-IT" dirty="0"/>
+              <a:t>call: </a:t>
+            </a:r>
+            <a:r>
+              <a:rPr lang="it-IT" dirty="0" err="1"/>
+              <a:t>creates</a:t>
+            </a:r>
+            <a:r>
+              <a:rPr lang="it-IT" dirty="0"/>
+              <a:t> a new </a:t>
+            </a:r>
+            <a:r>
+              <a:rPr lang="it-IT" dirty="0" err="1"/>
+              <a:t>request</a:t>
+            </a:r>
+            <a:r>
+              <a:rPr lang="it-IT" dirty="0"/>
+              <a:t>, </a:t>
+            </a:r>
+            <a:r>
+              <a:rPr lang="it-IT" dirty="0" err="1"/>
+              <a:t>deleting</a:t>
+            </a:r>
+            <a:r>
+              <a:rPr lang="it-IT" dirty="0"/>
+              <a:t> the </a:t>
+            </a:r>
+            <a:r>
+              <a:rPr lang="it-IT" dirty="0" err="1"/>
+              <a:t>old</a:t>
+            </a:r>
+            <a:r>
+              <a:rPr lang="it-IT" dirty="0"/>
+              <a:t> one from the </a:t>
+            </a:r>
+            <a:r>
+              <a:rPr lang="it-IT" dirty="0" err="1"/>
+              <a:t>same</a:t>
+            </a:r>
+            <a:r>
+              <a:rPr lang="it-IT" dirty="0"/>
+              <a:t> </a:t>
+            </a:r>
+            <a:r>
+              <a:rPr lang="it-IT" dirty="0" err="1"/>
+              <a:t>passenger</a:t>
+            </a:r>
+            <a:r>
+              <a:rPr lang="it-IT" dirty="0"/>
+              <a:t>.</a:t>
+            </a:r>
+          </a:p>
+          <a:p>
+            <a:r>
+              <a:rPr lang="it-IT" dirty="0"/>
+              <a:t>start/end: makes a location </a:t>
+            </a:r>
+            <a:r>
+              <a:rPr lang="it-IT" dirty="0" err="1"/>
+              <a:t>congested</a:t>
+            </a:r>
+            <a:r>
+              <a:rPr lang="it-IT" dirty="0"/>
+              <a:t> or makes </a:t>
+            </a:r>
+            <a:r>
+              <a:rPr lang="it-IT" dirty="0" err="1"/>
+              <a:t>it</a:t>
+            </a:r>
+            <a:r>
+              <a:rPr lang="it-IT" dirty="0"/>
+              <a:t> </a:t>
+            </a:r>
+            <a:r>
+              <a:rPr lang="it-IT" dirty="0" err="1"/>
+              <a:t>not</a:t>
+            </a:r>
+            <a:r>
+              <a:rPr lang="it-IT" dirty="0"/>
+              <a:t> </a:t>
+            </a:r>
+            <a:r>
+              <a:rPr lang="it-IT" dirty="0" err="1"/>
+              <a:t>if</a:t>
+            </a:r>
+            <a:r>
+              <a:rPr lang="it-IT" dirty="0"/>
+              <a:t> </a:t>
+            </a:r>
+            <a:r>
+              <a:rPr lang="it-IT" dirty="0" err="1"/>
+              <a:t>it</a:t>
+            </a:r>
+            <a:r>
+              <a:rPr lang="it-IT" dirty="0"/>
+              <a:t> </a:t>
+            </a:r>
+            <a:r>
+              <a:rPr lang="it-IT" dirty="0" err="1"/>
+              <a:t>was</a:t>
+            </a:r>
+            <a:r>
+              <a:rPr lang="it-IT" dirty="0"/>
+              <a:t>.</a:t>
+            </a:r>
+            <a:endParaRPr lang="en-US" dirty="0"/>
+          </a:p>
+        </p:txBody>
+      </p:sp>
+    </p:spTree>
+    <p:extLst>
+      <p:ext uri="{BB962C8B-B14F-4D97-AF65-F5344CB8AC3E}">
+        <p14:creationId xmlns:p14="http://schemas.microsoft.com/office/powerpoint/2010/main" val="3689507674"/>
+      </p:ext>
+    </p:extLst>
+  </p:cSld>
+  <p:clrMapOvr>
+    <a:masterClrMapping/>
+  </p:clrMapOvr>
+</p:sld>
+</file>
+
+<file path=ppt/slides/slide19.xml><?xml version="1.0" encoding="utf-8"?>
+<p:sld xmlns:a="http://schemas.openxmlformats.org/drawingml/2006/main" xmlns:r="http://schemas.openxmlformats.org/officeDocument/2006/relationships" xmlns:p="http://schemas.openxmlformats.org/presentationml/2006/main">
+  <p:cSld>
+    <p:spTree>
+      <p:nvGrpSpPr>
+        <p:cNvPr id="1" name=""/>
+        <p:cNvGrpSpPr/>
+        <p:nvPr/>
+      </p:nvGrpSpPr>
+      <p:grpSpPr>
+        <a:xfrm>
+          <a:off x="0" y="0"/>
+          <a:ext cx="0" cy="0"/>
+          <a:chOff x="0" y="0"/>
+          <a:chExt cx="0" cy="0"/>
+        </a:xfrm>
+      </p:grpSpPr>
+      <p:sp>
+        <p:nvSpPr>
+          <p:cNvPr id="2" name="Title 1">
+            <a:extLst>
+              <a:ext uri="{FF2B5EF4-FFF2-40B4-BE49-F238E27FC236}">
+                <a16:creationId xmlns:a16="http://schemas.microsoft.com/office/drawing/2014/main" id="{A0DD0F2D-BE2E-4767-94EB-D20E61B37DF3}"/>
+              </a:ext>
+            </a:extLst>
+          </p:cNvPr>
+          <p:cNvSpPr>
+            <a:spLocks noGrp="1"/>
+          </p:cNvSpPr>
+          <p:nvPr>
+            <p:ph type="title"/>
+          </p:nvPr>
+        </p:nvSpPr>
+        <p:spPr/>
+        <p:txBody>
+          <a:bodyPr/>
+          <a:lstStyle/>
+          <a:p>
+            <a:r>
+              <a:rPr lang="it-IT" dirty="0" err="1"/>
+              <a:t>Legality</a:t>
+            </a:r>
+            <a:r>
+              <a:rPr lang="it-IT" dirty="0"/>
+              <a:t> task</a:t>
+            </a:r>
+            <a:endParaRPr lang="en-US" dirty="0"/>
+          </a:p>
+        </p:txBody>
+      </p:sp>
+      <p:sp>
+        <p:nvSpPr>
+          <p:cNvPr id="3" name="Content Placeholder 2">
+            <a:extLst>
+              <a:ext uri="{FF2B5EF4-FFF2-40B4-BE49-F238E27FC236}">
+                <a16:creationId xmlns:a16="http://schemas.microsoft.com/office/drawing/2014/main" id="{06077E88-1A30-F475-E7DD-D74D09F59406}"/>
+              </a:ext>
+            </a:extLst>
+          </p:cNvPr>
+          <p:cNvSpPr>
+            <a:spLocks noGrp="1"/>
+          </p:cNvSpPr>
+          <p:nvPr>
+            <p:ph idx="1"/>
+          </p:nvPr>
+        </p:nvSpPr>
+        <p:spPr/>
+        <p:txBody>
+          <a:bodyPr/>
+          <a:lstStyle/>
+          <a:p>
+            <a:pPr marL="0" indent="0">
+              <a:buNone/>
+            </a:pPr>
+            <a:r>
+              <a:rPr lang="it-IT" dirty="0"/>
+              <a:t>To test the domain, </a:t>
+            </a:r>
+            <a:r>
+              <a:rPr lang="it-IT" dirty="0" err="1"/>
+              <a:t>we</a:t>
+            </a:r>
+            <a:r>
+              <a:rPr lang="it-IT" dirty="0"/>
+              <a:t> </a:t>
+            </a:r>
+            <a:r>
+              <a:rPr lang="it-IT" dirty="0" err="1"/>
+              <a:t>selected</a:t>
+            </a:r>
+            <a:r>
+              <a:rPr lang="it-IT" dirty="0"/>
+              <a:t> a </a:t>
+            </a:r>
+            <a:r>
+              <a:rPr lang="it-IT" dirty="0" err="1"/>
+              <a:t>series</a:t>
+            </a:r>
+            <a:r>
+              <a:rPr lang="it-IT" dirty="0"/>
+              <a:t> of actions </a:t>
+            </a:r>
+            <a:r>
+              <a:rPr lang="it-IT" dirty="0" err="1"/>
+              <a:t>as</a:t>
+            </a:r>
+            <a:r>
+              <a:rPr lang="it-IT" dirty="0"/>
+              <a:t> </a:t>
+            </a:r>
+            <a:r>
+              <a:rPr lang="it-IT" dirty="0" err="1"/>
+              <a:t>imput</a:t>
+            </a:r>
+            <a:r>
+              <a:rPr lang="it-IT" dirty="0"/>
+              <a:t> to the </a:t>
+            </a:r>
+            <a:r>
+              <a:rPr lang="it-IT" dirty="0" err="1"/>
+              <a:t>legality</a:t>
+            </a:r>
+            <a:r>
+              <a:rPr lang="it-IT" dirty="0"/>
+              <a:t> task, to check </a:t>
+            </a:r>
+            <a:r>
+              <a:rPr lang="it-IT" dirty="0" err="1"/>
+              <a:t>its</a:t>
+            </a:r>
+            <a:r>
+              <a:rPr lang="it-IT" dirty="0"/>
+              <a:t> </a:t>
+            </a:r>
+            <a:r>
+              <a:rPr lang="it-IT" dirty="0" err="1"/>
+              <a:t>executability</a:t>
+            </a:r>
+            <a:r>
+              <a:rPr lang="it-IT" dirty="0"/>
+              <a:t>.</a:t>
+            </a:r>
+          </a:p>
+          <a:p>
+            <a:pPr marL="0" indent="0">
+              <a:buNone/>
+            </a:pPr>
+            <a:endParaRPr lang="it-IT" dirty="0"/>
+          </a:p>
+          <a:p>
+            <a:pPr marL="0" indent="0">
+              <a:buNone/>
+            </a:pPr>
+            <a:r>
+              <a:rPr lang="it-IT" dirty="0"/>
+              <a:t>The task:</a:t>
+            </a:r>
+            <a:br>
+              <a:rPr lang="it-IT" dirty="0"/>
+            </a:br>
+            <a:r>
+              <a:rPr lang="en-US" dirty="0"/>
+              <a:t>[move(park1, restaurant), move(restaurant, school), </a:t>
+            </a:r>
+            <a:r>
+              <a:rPr lang="en-US" dirty="0" err="1"/>
+              <a:t>pickUp</a:t>
+            </a:r>
+            <a:r>
+              <a:rPr lang="en-US" dirty="0"/>
+              <a:t>(p2, school), move(school, restaurant), </a:t>
+            </a:r>
+            <a:r>
+              <a:rPr lang="en-US" dirty="0" err="1"/>
+              <a:t>getOff</a:t>
+            </a:r>
+            <a:r>
+              <a:rPr lang="en-US" dirty="0"/>
+              <a:t>(p2, restaurant)].</a:t>
+            </a:r>
+          </a:p>
+          <a:p>
+            <a:pPr marL="0" indent="0">
+              <a:buNone/>
+            </a:pPr>
+            <a:r>
+              <a:rPr lang="en-US" dirty="0"/>
+              <a:t>proved legal</a:t>
+            </a:r>
+          </a:p>
+          <a:p>
+            <a:pPr marL="0" indent="0">
+              <a:buNone/>
+            </a:pPr>
+            <a:endParaRPr lang="en-US"/>
+          </a:p>
+          <a:p>
+            <a:pPr marL="0" indent="0">
+              <a:buNone/>
+            </a:pPr>
+            <a:endParaRPr lang="en-US" dirty="0"/>
+          </a:p>
+        </p:txBody>
+      </p:sp>
+    </p:spTree>
+    <p:extLst>
+      <p:ext uri="{BB962C8B-B14F-4D97-AF65-F5344CB8AC3E}">
+        <p14:creationId xmlns:p14="http://schemas.microsoft.com/office/powerpoint/2010/main" val="1883632785"/>
+      </p:ext>
+    </p:extLst>
+  </p:cSld>
+  <p:clrMapOvr>
+    <a:masterClrMapping/>
+  </p:clrMapOvr>
+</p:sld>
+</file>
+
 <file path=ppt/slides/slide2.xml><?xml version="1.0" encoding="utf-8"?>
 <p:sld xmlns:a="http://schemas.openxmlformats.org/drawingml/2006/main" xmlns:r="http://schemas.openxmlformats.org/officeDocument/2006/relationships" xmlns:p="http://schemas.openxmlformats.org/presentationml/2006/main">
   <p:cSld>

--- a/documents/planning.pptx
+++ b/documents/planning.pptx
@@ -2,7 +2,7 @@
 <file path=ppt/presentation.xml><?xml version="1.0" encoding="utf-8"?>
 <p:presentation xmlns:a="http://schemas.openxmlformats.org/drawingml/2006/main" xmlns:r="http://schemas.openxmlformats.org/officeDocument/2006/relationships" xmlns:p="http://schemas.openxmlformats.org/presentationml/2006/main" saveSubsetFonts="1">
   <p:sldMasterIdLst>
-    <p:sldMasterId id="2147483648" r:id="rId1"/>
+    <p:sldMasterId id="2147483672" r:id="rId1"/>
   </p:sldMasterIdLst>
   <p:sldIdLst>
     <p:sldId id="256" r:id="rId2"/>
@@ -24,6 +24,8 @@
     <p:sldId id="272" r:id="rId18"/>
     <p:sldId id="273" r:id="rId19"/>
     <p:sldId id="274" r:id="rId20"/>
+    <p:sldId id="275" r:id="rId21"/>
+    <p:sldId id="276" r:id="rId22"/>
   </p:sldIdLst>
   <p:sldSz cx="12192000" cy="6858000"/>
   <p:notesSz cx="6858000" cy="9144000"/>
@@ -133,7 +135,7 @@
 <file path=ppt/charts/chart1.xml><?xml version="1.0" encoding="utf-8"?>
 <c:chartSpace xmlns:c="http://schemas.openxmlformats.org/drawingml/2006/chart" xmlns:a="http://schemas.openxmlformats.org/drawingml/2006/main" xmlns:r="http://schemas.openxmlformats.org/officeDocument/2006/relationships" xmlns:c16r2="http://schemas.microsoft.com/office/drawing/2015/06/chart">
   <c:date1904 val="0"/>
-  <c:lang val="en-US"/>
+  <c:lang val="it-IT"/>
   <c:roundedCorners val="0"/>
   <mc:AlternateContent xmlns:mc="http://schemas.openxmlformats.org/markup-compatibility/2006">
     <mc:Choice xmlns:c14="http://schemas.microsoft.com/office/drawing/2007/8/2/chart" Requires="c14">
@@ -1115,7 +1117,7 @@
           <p:cNvPr id="2" name="Titolo 1">
             <a:extLst>
               <a:ext uri="{FF2B5EF4-FFF2-40B4-BE49-F238E27FC236}">
-                <a16:creationId xmlns:a16="http://schemas.microsoft.com/office/drawing/2014/main" id="{B06F5684-165C-ED2B-2F44-ECC4A4F59959}"/>
+                <a16:creationId xmlns:a16="http://schemas.microsoft.com/office/drawing/2014/main" id="{4E3A28CB-22D4-F1B1-BEC3-CF0946D5AD3C}"/>
               </a:ext>
             </a:extLst>
           </p:cNvPr>
@@ -1152,7 +1154,7 @@
           <p:cNvPr id="3" name="Sottotitolo 2">
             <a:extLst>
               <a:ext uri="{FF2B5EF4-FFF2-40B4-BE49-F238E27FC236}">
-                <a16:creationId xmlns:a16="http://schemas.microsoft.com/office/drawing/2014/main" id="{0B043A99-B0D5-989D-3ECD-6CD563AD3A3C}"/>
+                <a16:creationId xmlns:a16="http://schemas.microsoft.com/office/drawing/2014/main" id="{3EF7A30C-C53D-659E-BF57-5F01B32FBEA8}"/>
               </a:ext>
             </a:extLst>
           </p:cNvPr>
@@ -1222,7 +1224,7 @@
           <p:cNvPr id="4" name="Segnaposto data 3">
             <a:extLst>
               <a:ext uri="{FF2B5EF4-FFF2-40B4-BE49-F238E27FC236}">
-                <a16:creationId xmlns:a16="http://schemas.microsoft.com/office/drawing/2014/main" id="{791CA953-262F-362C-E084-5D4DDBA63B21}"/>
+                <a16:creationId xmlns:a16="http://schemas.microsoft.com/office/drawing/2014/main" id="{991816C8-5D63-4AD5-B8F8-AFEE3087F925}"/>
               </a:ext>
             </a:extLst>
           </p:cNvPr>
@@ -1251,7 +1253,7 @@
           <p:cNvPr id="5" name="Segnaposto piè di pagina 4">
             <a:extLst>
               <a:ext uri="{FF2B5EF4-FFF2-40B4-BE49-F238E27FC236}">
-                <a16:creationId xmlns:a16="http://schemas.microsoft.com/office/drawing/2014/main" id="{1CBA7AD4-AFFA-6E7E-076E-60A6C22CCCD8}"/>
+                <a16:creationId xmlns:a16="http://schemas.microsoft.com/office/drawing/2014/main" id="{FAFCAB74-55C8-9CED-3C57-DA1D8E2228A2}"/>
               </a:ext>
             </a:extLst>
           </p:cNvPr>
@@ -1276,7 +1278,7 @@
           <p:cNvPr id="6" name="Segnaposto numero diapositiva 5">
             <a:extLst>
               <a:ext uri="{FF2B5EF4-FFF2-40B4-BE49-F238E27FC236}">
-                <a16:creationId xmlns:a16="http://schemas.microsoft.com/office/drawing/2014/main" id="{0C76CC99-EB14-0742-3FAD-D236BF8B8188}"/>
+                <a16:creationId xmlns:a16="http://schemas.microsoft.com/office/drawing/2014/main" id="{BE4956FC-F55F-A98E-001E-93D94458773B}"/>
               </a:ext>
             </a:extLst>
           </p:cNvPr>
@@ -1294,7 +1296,7 @@
           <a:p>
             <a:fld id="{582BBC32-35E8-4D81-A426-2E8D4D9B0A60}" type="slidenum">
               <a:rPr lang="it-IT" smtClean="0"/>
-              <a:t>‹#›</a:t>
+              <a:t>‹N›</a:t>
             </a:fld>
             <a:endParaRPr lang="it-IT"/>
           </a:p>
@@ -1303,7 +1305,7 @@
     </p:spTree>
     <p:extLst>
       <p:ext uri="{BB962C8B-B14F-4D97-AF65-F5344CB8AC3E}">
-        <p14:creationId xmlns:p14="http://schemas.microsoft.com/office/powerpoint/2010/main" val="2713416495"/>
+        <p14:creationId xmlns:p14="http://schemas.microsoft.com/office/powerpoint/2010/main" val="3352680818"/>
       </p:ext>
     </p:extLst>
   </p:cSld>
@@ -1335,7 +1337,7 @@
           <p:cNvPr id="2" name="Titolo 1">
             <a:extLst>
               <a:ext uri="{FF2B5EF4-FFF2-40B4-BE49-F238E27FC236}">
-                <a16:creationId xmlns:a16="http://schemas.microsoft.com/office/drawing/2014/main" id="{32DCC135-ABBC-B0E0-1FD3-B2C9CA06D193}"/>
+                <a16:creationId xmlns:a16="http://schemas.microsoft.com/office/drawing/2014/main" id="{4137E45B-D0EA-59E0-02FA-420FA98C0B47}"/>
               </a:ext>
             </a:extLst>
           </p:cNvPr>
@@ -1363,7 +1365,7 @@
           <p:cNvPr id="3" name="Segnaposto testo verticale 2">
             <a:extLst>
               <a:ext uri="{FF2B5EF4-FFF2-40B4-BE49-F238E27FC236}">
-                <a16:creationId xmlns:a16="http://schemas.microsoft.com/office/drawing/2014/main" id="{354D2FB2-A58F-D59A-D6D5-AB774E2CF7C7}"/>
+                <a16:creationId xmlns:a16="http://schemas.microsoft.com/office/drawing/2014/main" id="{EAE44365-24E7-5FF3-026A-AEA9AFDA73B1}"/>
               </a:ext>
             </a:extLst>
           </p:cNvPr>
@@ -1420,7 +1422,7 @@
           <p:cNvPr id="4" name="Segnaposto data 3">
             <a:extLst>
               <a:ext uri="{FF2B5EF4-FFF2-40B4-BE49-F238E27FC236}">
-                <a16:creationId xmlns:a16="http://schemas.microsoft.com/office/drawing/2014/main" id="{B6FB4C3B-9D36-C3E0-6A53-2FEFE9F2CE10}"/>
+                <a16:creationId xmlns:a16="http://schemas.microsoft.com/office/drawing/2014/main" id="{7FDF8822-BB78-6DF6-924C-B489F373B9BA}"/>
               </a:ext>
             </a:extLst>
           </p:cNvPr>
@@ -1449,7 +1451,7 @@
           <p:cNvPr id="5" name="Segnaposto piè di pagina 4">
             <a:extLst>
               <a:ext uri="{FF2B5EF4-FFF2-40B4-BE49-F238E27FC236}">
-                <a16:creationId xmlns:a16="http://schemas.microsoft.com/office/drawing/2014/main" id="{C41AE5E0-1A5F-5A4C-01CB-C733B0FCB259}"/>
+                <a16:creationId xmlns:a16="http://schemas.microsoft.com/office/drawing/2014/main" id="{2F9300C4-C81E-1777-C436-9F989E756F21}"/>
               </a:ext>
             </a:extLst>
           </p:cNvPr>
@@ -1474,7 +1476,7 @@
           <p:cNvPr id="6" name="Segnaposto numero diapositiva 5">
             <a:extLst>
               <a:ext uri="{FF2B5EF4-FFF2-40B4-BE49-F238E27FC236}">
-                <a16:creationId xmlns:a16="http://schemas.microsoft.com/office/drawing/2014/main" id="{92C0706D-DF97-63E1-B57C-0603C0F0F0B6}"/>
+                <a16:creationId xmlns:a16="http://schemas.microsoft.com/office/drawing/2014/main" id="{5FCE13ED-1FBB-E997-41C3-301FF55085CD}"/>
               </a:ext>
             </a:extLst>
           </p:cNvPr>
@@ -1492,7 +1494,7 @@
           <a:p>
             <a:fld id="{582BBC32-35E8-4D81-A426-2E8D4D9B0A60}" type="slidenum">
               <a:rPr lang="it-IT" smtClean="0"/>
-              <a:t>‹#›</a:t>
+              <a:t>‹N›</a:t>
             </a:fld>
             <a:endParaRPr lang="it-IT"/>
           </a:p>
@@ -1501,7 +1503,7 @@
     </p:spTree>
     <p:extLst>
       <p:ext uri="{BB962C8B-B14F-4D97-AF65-F5344CB8AC3E}">
-        <p14:creationId xmlns:p14="http://schemas.microsoft.com/office/powerpoint/2010/main" val="615340493"/>
+        <p14:creationId xmlns:p14="http://schemas.microsoft.com/office/powerpoint/2010/main" val="2945381100"/>
       </p:ext>
     </p:extLst>
   </p:cSld>
@@ -1533,7 +1535,7 @@
           <p:cNvPr id="2" name="Titolo verticale 1">
             <a:extLst>
               <a:ext uri="{FF2B5EF4-FFF2-40B4-BE49-F238E27FC236}">
-                <a16:creationId xmlns:a16="http://schemas.microsoft.com/office/drawing/2014/main" id="{BA67CB28-7EDA-027B-DB9C-416916A740EE}"/>
+                <a16:creationId xmlns:a16="http://schemas.microsoft.com/office/drawing/2014/main" id="{06CFD6C9-1889-C1B0-348B-6F085C13F08C}"/>
               </a:ext>
             </a:extLst>
           </p:cNvPr>
@@ -1566,7 +1568,7 @@
           <p:cNvPr id="3" name="Segnaposto testo verticale 2">
             <a:extLst>
               <a:ext uri="{FF2B5EF4-FFF2-40B4-BE49-F238E27FC236}">
-                <a16:creationId xmlns:a16="http://schemas.microsoft.com/office/drawing/2014/main" id="{34DC1145-71D2-C9BE-E304-DAF93B2F11CA}"/>
+                <a16:creationId xmlns:a16="http://schemas.microsoft.com/office/drawing/2014/main" id="{84DED2D2-CD9D-39D0-7028-08F96C70BBB9}"/>
               </a:ext>
             </a:extLst>
           </p:cNvPr>
@@ -1628,7 +1630,7 @@
           <p:cNvPr id="4" name="Segnaposto data 3">
             <a:extLst>
               <a:ext uri="{FF2B5EF4-FFF2-40B4-BE49-F238E27FC236}">
-                <a16:creationId xmlns:a16="http://schemas.microsoft.com/office/drawing/2014/main" id="{9A9AB012-A5E3-6CE2-1874-14621E277AF5}"/>
+                <a16:creationId xmlns:a16="http://schemas.microsoft.com/office/drawing/2014/main" id="{CCCDB8FC-C2C6-38EE-29F4-C0FB3EDF72C1}"/>
               </a:ext>
             </a:extLst>
           </p:cNvPr>
@@ -1657,7 +1659,7 @@
           <p:cNvPr id="5" name="Segnaposto piè di pagina 4">
             <a:extLst>
               <a:ext uri="{FF2B5EF4-FFF2-40B4-BE49-F238E27FC236}">
-                <a16:creationId xmlns:a16="http://schemas.microsoft.com/office/drawing/2014/main" id="{7CA617C2-1B9C-9304-2284-8E10EDFEE3EC}"/>
+                <a16:creationId xmlns:a16="http://schemas.microsoft.com/office/drawing/2014/main" id="{059AC4B2-3ED3-A8EF-F0FD-D7D0E92F5A3B}"/>
               </a:ext>
             </a:extLst>
           </p:cNvPr>
@@ -1682,7 +1684,7 @@
           <p:cNvPr id="6" name="Segnaposto numero diapositiva 5">
             <a:extLst>
               <a:ext uri="{FF2B5EF4-FFF2-40B4-BE49-F238E27FC236}">
-                <a16:creationId xmlns:a16="http://schemas.microsoft.com/office/drawing/2014/main" id="{F4AF0174-00E6-1FAA-6DA9-B41707E4E54A}"/>
+                <a16:creationId xmlns:a16="http://schemas.microsoft.com/office/drawing/2014/main" id="{176AF6EE-5021-1E64-BA1F-482E390FF091}"/>
               </a:ext>
             </a:extLst>
           </p:cNvPr>
@@ -1700,7 +1702,7 @@
           <a:p>
             <a:fld id="{582BBC32-35E8-4D81-A426-2E8D4D9B0A60}" type="slidenum">
               <a:rPr lang="it-IT" smtClean="0"/>
-              <a:t>‹#›</a:t>
+              <a:t>‹N›</a:t>
             </a:fld>
             <a:endParaRPr lang="it-IT"/>
           </a:p>
@@ -1709,7 +1711,7 @@
     </p:spTree>
     <p:extLst>
       <p:ext uri="{BB962C8B-B14F-4D97-AF65-F5344CB8AC3E}">
-        <p14:creationId xmlns:p14="http://schemas.microsoft.com/office/powerpoint/2010/main" val="2910416317"/>
+        <p14:creationId xmlns:p14="http://schemas.microsoft.com/office/powerpoint/2010/main" val="247357957"/>
       </p:ext>
     </p:extLst>
   </p:cSld>
@@ -1741,7 +1743,7 @@
           <p:cNvPr id="2" name="Titolo 1">
             <a:extLst>
               <a:ext uri="{FF2B5EF4-FFF2-40B4-BE49-F238E27FC236}">
-                <a16:creationId xmlns:a16="http://schemas.microsoft.com/office/drawing/2014/main" id="{D489F51B-9838-98C5-3945-91187594B4CB}"/>
+                <a16:creationId xmlns:a16="http://schemas.microsoft.com/office/drawing/2014/main" id="{4EECCEB5-B495-C587-4CA2-6596F18D1751}"/>
               </a:ext>
             </a:extLst>
           </p:cNvPr>
@@ -1769,7 +1771,7 @@
           <p:cNvPr id="3" name="Segnaposto contenuto 2">
             <a:extLst>
               <a:ext uri="{FF2B5EF4-FFF2-40B4-BE49-F238E27FC236}">
-                <a16:creationId xmlns:a16="http://schemas.microsoft.com/office/drawing/2014/main" id="{D7FFA563-1D52-F4DB-A18C-B8C0FA7076F4}"/>
+                <a16:creationId xmlns:a16="http://schemas.microsoft.com/office/drawing/2014/main" id="{3D397CD7-3D31-B63B-4FBC-CF594C979323}"/>
               </a:ext>
             </a:extLst>
           </p:cNvPr>
@@ -1826,7 +1828,7 @@
           <p:cNvPr id="4" name="Segnaposto data 3">
             <a:extLst>
               <a:ext uri="{FF2B5EF4-FFF2-40B4-BE49-F238E27FC236}">
-                <a16:creationId xmlns:a16="http://schemas.microsoft.com/office/drawing/2014/main" id="{F6B1D167-B09E-4171-0AA1-A46186E549AF}"/>
+                <a16:creationId xmlns:a16="http://schemas.microsoft.com/office/drawing/2014/main" id="{7347405E-42CD-5AE6-A7B4-A2DFCB2B7EA2}"/>
               </a:ext>
             </a:extLst>
           </p:cNvPr>
@@ -1855,7 +1857,7 @@
           <p:cNvPr id="5" name="Segnaposto piè di pagina 4">
             <a:extLst>
               <a:ext uri="{FF2B5EF4-FFF2-40B4-BE49-F238E27FC236}">
-                <a16:creationId xmlns:a16="http://schemas.microsoft.com/office/drawing/2014/main" id="{02D41CDE-7450-7C60-CF49-0F92C2E66EED}"/>
+                <a16:creationId xmlns:a16="http://schemas.microsoft.com/office/drawing/2014/main" id="{FB9BA4BC-5E68-FB5F-3D0A-842D63EC7D8A}"/>
               </a:ext>
             </a:extLst>
           </p:cNvPr>
@@ -1880,7 +1882,7 @@
           <p:cNvPr id="6" name="Segnaposto numero diapositiva 5">
             <a:extLst>
               <a:ext uri="{FF2B5EF4-FFF2-40B4-BE49-F238E27FC236}">
-                <a16:creationId xmlns:a16="http://schemas.microsoft.com/office/drawing/2014/main" id="{DEF9D7E2-361D-271D-3B10-CF5157F6B794}"/>
+                <a16:creationId xmlns:a16="http://schemas.microsoft.com/office/drawing/2014/main" id="{DA954ABD-D312-0473-8F7C-524EBDDCAA72}"/>
               </a:ext>
             </a:extLst>
           </p:cNvPr>
@@ -1898,7 +1900,7 @@
           <a:p>
             <a:fld id="{582BBC32-35E8-4D81-A426-2E8D4D9B0A60}" type="slidenum">
               <a:rPr lang="it-IT" smtClean="0"/>
-              <a:t>‹#›</a:t>
+              <a:t>‹N›</a:t>
             </a:fld>
             <a:endParaRPr lang="it-IT"/>
           </a:p>
@@ -1907,7 +1909,7 @@
     </p:spTree>
     <p:extLst>
       <p:ext uri="{BB962C8B-B14F-4D97-AF65-F5344CB8AC3E}">
-        <p14:creationId xmlns:p14="http://schemas.microsoft.com/office/powerpoint/2010/main" val="1295233090"/>
+        <p14:creationId xmlns:p14="http://schemas.microsoft.com/office/powerpoint/2010/main" val="1839967121"/>
       </p:ext>
     </p:extLst>
   </p:cSld>
@@ -1939,7 +1941,7 @@
           <p:cNvPr id="2" name="Titolo 1">
             <a:extLst>
               <a:ext uri="{FF2B5EF4-FFF2-40B4-BE49-F238E27FC236}">
-                <a16:creationId xmlns:a16="http://schemas.microsoft.com/office/drawing/2014/main" id="{AAFAF62A-7CD0-0B77-7B9C-E7B8A8E8847C}"/>
+                <a16:creationId xmlns:a16="http://schemas.microsoft.com/office/drawing/2014/main" id="{2B5040A0-50C7-0A8A-2879-A66E7224A913}"/>
               </a:ext>
             </a:extLst>
           </p:cNvPr>
@@ -1976,7 +1978,7 @@
           <p:cNvPr id="3" name="Segnaposto testo 2">
             <a:extLst>
               <a:ext uri="{FF2B5EF4-FFF2-40B4-BE49-F238E27FC236}">
-                <a16:creationId xmlns:a16="http://schemas.microsoft.com/office/drawing/2014/main" id="{10AE3636-90AF-28E8-52C1-8A7568E8CE6F}"/>
+                <a16:creationId xmlns:a16="http://schemas.microsoft.com/office/drawing/2014/main" id="{6539346E-3450-7F6F-71A2-CD5D92AA9735}"/>
               </a:ext>
             </a:extLst>
           </p:cNvPr>
@@ -2101,7 +2103,7 @@
           <p:cNvPr id="4" name="Segnaposto data 3">
             <a:extLst>
               <a:ext uri="{FF2B5EF4-FFF2-40B4-BE49-F238E27FC236}">
-                <a16:creationId xmlns:a16="http://schemas.microsoft.com/office/drawing/2014/main" id="{A236BF92-844C-AAD3-C64E-BEFD8943D9D8}"/>
+                <a16:creationId xmlns:a16="http://schemas.microsoft.com/office/drawing/2014/main" id="{EB465732-F72E-D265-6B65-F4A190924CCE}"/>
               </a:ext>
             </a:extLst>
           </p:cNvPr>
@@ -2130,7 +2132,7 @@
           <p:cNvPr id="5" name="Segnaposto piè di pagina 4">
             <a:extLst>
               <a:ext uri="{FF2B5EF4-FFF2-40B4-BE49-F238E27FC236}">
-                <a16:creationId xmlns:a16="http://schemas.microsoft.com/office/drawing/2014/main" id="{3B4092F8-D73A-01C3-D336-78480C31DBAF}"/>
+                <a16:creationId xmlns:a16="http://schemas.microsoft.com/office/drawing/2014/main" id="{FA54D7B7-90A1-8B0F-64E5-75E7AAD17439}"/>
               </a:ext>
             </a:extLst>
           </p:cNvPr>
@@ -2155,7 +2157,7 @@
           <p:cNvPr id="6" name="Segnaposto numero diapositiva 5">
             <a:extLst>
               <a:ext uri="{FF2B5EF4-FFF2-40B4-BE49-F238E27FC236}">
-                <a16:creationId xmlns:a16="http://schemas.microsoft.com/office/drawing/2014/main" id="{D5CB543F-94B4-1652-B4A6-161920BD40B0}"/>
+                <a16:creationId xmlns:a16="http://schemas.microsoft.com/office/drawing/2014/main" id="{BDEC7684-FBBD-3635-73C3-F595FB0C6887}"/>
               </a:ext>
             </a:extLst>
           </p:cNvPr>
@@ -2173,7 +2175,7 @@
           <a:p>
             <a:fld id="{582BBC32-35E8-4D81-A426-2E8D4D9B0A60}" type="slidenum">
               <a:rPr lang="it-IT" smtClean="0"/>
-              <a:t>‹#›</a:t>
+              <a:t>‹N›</a:t>
             </a:fld>
             <a:endParaRPr lang="it-IT"/>
           </a:p>
@@ -2182,7 +2184,7 @@
     </p:spTree>
     <p:extLst>
       <p:ext uri="{BB962C8B-B14F-4D97-AF65-F5344CB8AC3E}">
-        <p14:creationId xmlns:p14="http://schemas.microsoft.com/office/powerpoint/2010/main" val="697750355"/>
+        <p14:creationId xmlns:p14="http://schemas.microsoft.com/office/powerpoint/2010/main" val="3886388338"/>
       </p:ext>
     </p:extLst>
   </p:cSld>
@@ -2214,7 +2216,7 @@
           <p:cNvPr id="2" name="Titolo 1">
             <a:extLst>
               <a:ext uri="{FF2B5EF4-FFF2-40B4-BE49-F238E27FC236}">
-                <a16:creationId xmlns:a16="http://schemas.microsoft.com/office/drawing/2014/main" id="{9D35CFE8-813B-6BA9-4A7D-F8755EC6A504}"/>
+                <a16:creationId xmlns:a16="http://schemas.microsoft.com/office/drawing/2014/main" id="{22813D55-5A41-C769-1345-9D2433E45CA4}"/>
               </a:ext>
             </a:extLst>
           </p:cNvPr>
@@ -2242,7 +2244,7 @@
           <p:cNvPr id="3" name="Segnaposto contenuto 2">
             <a:extLst>
               <a:ext uri="{FF2B5EF4-FFF2-40B4-BE49-F238E27FC236}">
-                <a16:creationId xmlns:a16="http://schemas.microsoft.com/office/drawing/2014/main" id="{5131D12F-5F17-50FC-F83B-709D517E01A8}"/>
+                <a16:creationId xmlns:a16="http://schemas.microsoft.com/office/drawing/2014/main" id="{87366223-6308-C495-D2C0-D2FE2DA3E6C0}"/>
               </a:ext>
             </a:extLst>
           </p:cNvPr>
@@ -2304,7 +2306,7 @@
           <p:cNvPr id="4" name="Segnaposto contenuto 3">
             <a:extLst>
               <a:ext uri="{FF2B5EF4-FFF2-40B4-BE49-F238E27FC236}">
-                <a16:creationId xmlns:a16="http://schemas.microsoft.com/office/drawing/2014/main" id="{3F9C56BC-7378-7159-E889-AC2D5D61C36F}"/>
+                <a16:creationId xmlns:a16="http://schemas.microsoft.com/office/drawing/2014/main" id="{079C9169-CE48-9D1F-3CC4-DB820618A005}"/>
               </a:ext>
             </a:extLst>
           </p:cNvPr>
@@ -2366,7 +2368,7 @@
           <p:cNvPr id="5" name="Segnaposto data 4">
             <a:extLst>
               <a:ext uri="{FF2B5EF4-FFF2-40B4-BE49-F238E27FC236}">
-                <a16:creationId xmlns:a16="http://schemas.microsoft.com/office/drawing/2014/main" id="{5E52EE87-0FB9-7272-A592-F5DC11312A00}"/>
+                <a16:creationId xmlns:a16="http://schemas.microsoft.com/office/drawing/2014/main" id="{D42D29CF-B628-422B-775F-638DFA4D704E}"/>
               </a:ext>
             </a:extLst>
           </p:cNvPr>
@@ -2395,7 +2397,7 @@
           <p:cNvPr id="6" name="Segnaposto piè di pagina 5">
             <a:extLst>
               <a:ext uri="{FF2B5EF4-FFF2-40B4-BE49-F238E27FC236}">
-                <a16:creationId xmlns:a16="http://schemas.microsoft.com/office/drawing/2014/main" id="{EBF29533-90F9-B73F-80A6-557453E31AE8}"/>
+                <a16:creationId xmlns:a16="http://schemas.microsoft.com/office/drawing/2014/main" id="{DA7BA909-7BF3-A99D-B9D8-5113104D2DE2}"/>
               </a:ext>
             </a:extLst>
           </p:cNvPr>
@@ -2420,7 +2422,7 @@
           <p:cNvPr id="7" name="Segnaposto numero diapositiva 6">
             <a:extLst>
               <a:ext uri="{FF2B5EF4-FFF2-40B4-BE49-F238E27FC236}">
-                <a16:creationId xmlns:a16="http://schemas.microsoft.com/office/drawing/2014/main" id="{D9F2B354-F13C-B560-449D-630541E6EA7E}"/>
+                <a16:creationId xmlns:a16="http://schemas.microsoft.com/office/drawing/2014/main" id="{F93F2F18-3A5E-98C5-C1E1-E2A0782A843F}"/>
               </a:ext>
             </a:extLst>
           </p:cNvPr>
@@ -2438,7 +2440,7 @@
           <a:p>
             <a:fld id="{582BBC32-35E8-4D81-A426-2E8D4D9B0A60}" type="slidenum">
               <a:rPr lang="it-IT" smtClean="0"/>
-              <a:t>‹#›</a:t>
+              <a:t>‹N›</a:t>
             </a:fld>
             <a:endParaRPr lang="it-IT"/>
           </a:p>
@@ -2447,7 +2449,7 @@
     </p:spTree>
     <p:extLst>
       <p:ext uri="{BB962C8B-B14F-4D97-AF65-F5344CB8AC3E}">
-        <p14:creationId xmlns:p14="http://schemas.microsoft.com/office/powerpoint/2010/main" val="2443757652"/>
+        <p14:creationId xmlns:p14="http://schemas.microsoft.com/office/powerpoint/2010/main" val="618871045"/>
       </p:ext>
     </p:extLst>
   </p:cSld>
@@ -2479,7 +2481,7 @@
           <p:cNvPr id="2" name="Titolo 1">
             <a:extLst>
               <a:ext uri="{FF2B5EF4-FFF2-40B4-BE49-F238E27FC236}">
-                <a16:creationId xmlns:a16="http://schemas.microsoft.com/office/drawing/2014/main" id="{602E8E9A-6ADF-07C2-DF9F-18BCF9E7064E}"/>
+                <a16:creationId xmlns:a16="http://schemas.microsoft.com/office/drawing/2014/main" id="{33E94711-E989-798A-3585-02E90EBF11E1}"/>
               </a:ext>
             </a:extLst>
           </p:cNvPr>
@@ -2512,7 +2514,7 @@
           <p:cNvPr id="3" name="Segnaposto testo 2">
             <a:extLst>
               <a:ext uri="{FF2B5EF4-FFF2-40B4-BE49-F238E27FC236}">
-                <a16:creationId xmlns:a16="http://schemas.microsoft.com/office/drawing/2014/main" id="{8173EABB-5BD7-EA6B-01DB-C5A57DB666B3}"/>
+                <a16:creationId xmlns:a16="http://schemas.microsoft.com/office/drawing/2014/main" id="{74C2C196-D733-F063-7C6B-070F16241B71}"/>
               </a:ext>
             </a:extLst>
           </p:cNvPr>
@@ -2583,7 +2585,7 @@
           <p:cNvPr id="4" name="Segnaposto contenuto 3">
             <a:extLst>
               <a:ext uri="{FF2B5EF4-FFF2-40B4-BE49-F238E27FC236}">
-                <a16:creationId xmlns:a16="http://schemas.microsoft.com/office/drawing/2014/main" id="{B2E2D897-FA4F-3C86-27B2-1ED8112AB515}"/>
+                <a16:creationId xmlns:a16="http://schemas.microsoft.com/office/drawing/2014/main" id="{3685C4A1-9BE8-29C1-D744-FFCA5E1636B1}"/>
               </a:ext>
             </a:extLst>
           </p:cNvPr>
@@ -2645,7 +2647,7 @@
           <p:cNvPr id="5" name="Segnaposto testo 4">
             <a:extLst>
               <a:ext uri="{FF2B5EF4-FFF2-40B4-BE49-F238E27FC236}">
-                <a16:creationId xmlns:a16="http://schemas.microsoft.com/office/drawing/2014/main" id="{24235102-3DFD-DD54-E372-605B6B697464}"/>
+                <a16:creationId xmlns:a16="http://schemas.microsoft.com/office/drawing/2014/main" id="{19F3D9F2-3731-ACA0-AA39-0C4525F9555A}"/>
               </a:ext>
             </a:extLst>
           </p:cNvPr>
@@ -2716,7 +2718,7 @@
           <p:cNvPr id="6" name="Segnaposto contenuto 5">
             <a:extLst>
               <a:ext uri="{FF2B5EF4-FFF2-40B4-BE49-F238E27FC236}">
-                <a16:creationId xmlns:a16="http://schemas.microsoft.com/office/drawing/2014/main" id="{C244FE67-1DB8-383F-A971-A536E89280E8}"/>
+                <a16:creationId xmlns:a16="http://schemas.microsoft.com/office/drawing/2014/main" id="{99560B71-72BF-BB50-2E90-BA6FB9C35CC4}"/>
               </a:ext>
             </a:extLst>
           </p:cNvPr>
@@ -2778,7 +2780,7 @@
           <p:cNvPr id="7" name="Segnaposto data 6">
             <a:extLst>
               <a:ext uri="{FF2B5EF4-FFF2-40B4-BE49-F238E27FC236}">
-                <a16:creationId xmlns:a16="http://schemas.microsoft.com/office/drawing/2014/main" id="{83C8AE79-DDEF-A339-8391-45E831E872EA}"/>
+                <a16:creationId xmlns:a16="http://schemas.microsoft.com/office/drawing/2014/main" id="{53F36E56-E990-D22A-5EAE-631E18D22EFC}"/>
               </a:ext>
             </a:extLst>
           </p:cNvPr>
@@ -2807,7 +2809,7 @@
           <p:cNvPr id="8" name="Segnaposto piè di pagina 7">
             <a:extLst>
               <a:ext uri="{FF2B5EF4-FFF2-40B4-BE49-F238E27FC236}">
-                <a16:creationId xmlns:a16="http://schemas.microsoft.com/office/drawing/2014/main" id="{10305550-E05C-9BE4-7339-A1F921120965}"/>
+                <a16:creationId xmlns:a16="http://schemas.microsoft.com/office/drawing/2014/main" id="{E8808D5C-F073-CBD1-458E-2E92D64D40C4}"/>
               </a:ext>
             </a:extLst>
           </p:cNvPr>
@@ -2832,7 +2834,7 @@
           <p:cNvPr id="9" name="Segnaposto numero diapositiva 8">
             <a:extLst>
               <a:ext uri="{FF2B5EF4-FFF2-40B4-BE49-F238E27FC236}">
-                <a16:creationId xmlns:a16="http://schemas.microsoft.com/office/drawing/2014/main" id="{6BC06688-A015-F7FA-DF90-68B3B0CC6501}"/>
+                <a16:creationId xmlns:a16="http://schemas.microsoft.com/office/drawing/2014/main" id="{9B8B0F94-E194-7ACB-DDD4-A1D8D3A08560}"/>
               </a:ext>
             </a:extLst>
           </p:cNvPr>
@@ -2850,7 +2852,7 @@
           <a:p>
             <a:fld id="{582BBC32-35E8-4D81-A426-2E8D4D9B0A60}" type="slidenum">
               <a:rPr lang="it-IT" smtClean="0"/>
-              <a:t>‹#›</a:t>
+              <a:t>‹N›</a:t>
             </a:fld>
             <a:endParaRPr lang="it-IT"/>
           </a:p>
@@ -2859,7 +2861,7 @@
     </p:spTree>
     <p:extLst>
       <p:ext uri="{BB962C8B-B14F-4D97-AF65-F5344CB8AC3E}">
-        <p14:creationId xmlns:p14="http://schemas.microsoft.com/office/powerpoint/2010/main" val="3370959802"/>
+        <p14:creationId xmlns:p14="http://schemas.microsoft.com/office/powerpoint/2010/main" val="1148261890"/>
       </p:ext>
     </p:extLst>
   </p:cSld>
@@ -2891,7 +2893,7 @@
           <p:cNvPr id="2" name="Titolo 1">
             <a:extLst>
               <a:ext uri="{FF2B5EF4-FFF2-40B4-BE49-F238E27FC236}">
-                <a16:creationId xmlns:a16="http://schemas.microsoft.com/office/drawing/2014/main" id="{2BC47396-2299-19C0-C39D-3E9D117FB9B4}"/>
+                <a16:creationId xmlns:a16="http://schemas.microsoft.com/office/drawing/2014/main" id="{C51548D5-0121-7901-BE4E-95E3D7FE2311}"/>
               </a:ext>
             </a:extLst>
           </p:cNvPr>
@@ -2919,7 +2921,7 @@
           <p:cNvPr id="3" name="Segnaposto data 2">
             <a:extLst>
               <a:ext uri="{FF2B5EF4-FFF2-40B4-BE49-F238E27FC236}">
-                <a16:creationId xmlns:a16="http://schemas.microsoft.com/office/drawing/2014/main" id="{76DC78CC-78D8-7A11-8BB1-ECDA95C152BE}"/>
+                <a16:creationId xmlns:a16="http://schemas.microsoft.com/office/drawing/2014/main" id="{07AD8BBD-AE53-B0CF-4A8B-10EB44A3DFFE}"/>
               </a:ext>
             </a:extLst>
           </p:cNvPr>
@@ -2948,7 +2950,7 @@
           <p:cNvPr id="4" name="Segnaposto piè di pagina 3">
             <a:extLst>
               <a:ext uri="{FF2B5EF4-FFF2-40B4-BE49-F238E27FC236}">
-                <a16:creationId xmlns:a16="http://schemas.microsoft.com/office/drawing/2014/main" id="{713ED834-17CC-DD61-3324-BACBC3567F88}"/>
+                <a16:creationId xmlns:a16="http://schemas.microsoft.com/office/drawing/2014/main" id="{55EF7295-3390-EBF5-24F5-B01BB471B91F}"/>
               </a:ext>
             </a:extLst>
           </p:cNvPr>
@@ -2973,7 +2975,7 @@
           <p:cNvPr id="5" name="Segnaposto numero diapositiva 4">
             <a:extLst>
               <a:ext uri="{FF2B5EF4-FFF2-40B4-BE49-F238E27FC236}">
-                <a16:creationId xmlns:a16="http://schemas.microsoft.com/office/drawing/2014/main" id="{76A52C0D-1046-78AA-D672-909462C1DDAA}"/>
+                <a16:creationId xmlns:a16="http://schemas.microsoft.com/office/drawing/2014/main" id="{FE2C1170-D1D9-6C77-1A90-13B3BED85287}"/>
               </a:ext>
             </a:extLst>
           </p:cNvPr>
@@ -2991,7 +2993,7 @@
           <a:p>
             <a:fld id="{582BBC32-35E8-4D81-A426-2E8D4D9B0A60}" type="slidenum">
               <a:rPr lang="it-IT" smtClean="0"/>
-              <a:t>‹#›</a:t>
+              <a:t>‹N›</a:t>
             </a:fld>
             <a:endParaRPr lang="it-IT"/>
           </a:p>
@@ -3000,7 +3002,7 @@
     </p:spTree>
     <p:extLst>
       <p:ext uri="{BB962C8B-B14F-4D97-AF65-F5344CB8AC3E}">
-        <p14:creationId xmlns:p14="http://schemas.microsoft.com/office/powerpoint/2010/main" val="3454696600"/>
+        <p14:creationId xmlns:p14="http://schemas.microsoft.com/office/powerpoint/2010/main" val="3267239767"/>
       </p:ext>
     </p:extLst>
   </p:cSld>
@@ -3032,7 +3034,7 @@
           <p:cNvPr id="2" name="Segnaposto data 1">
             <a:extLst>
               <a:ext uri="{FF2B5EF4-FFF2-40B4-BE49-F238E27FC236}">
-                <a16:creationId xmlns:a16="http://schemas.microsoft.com/office/drawing/2014/main" id="{2AB49CA5-2B87-347A-CEEC-11CAFC38198D}"/>
+                <a16:creationId xmlns:a16="http://schemas.microsoft.com/office/drawing/2014/main" id="{C16B1372-BD17-8047-6506-5DEE131B8CCF}"/>
               </a:ext>
             </a:extLst>
           </p:cNvPr>
@@ -3061,7 +3063,7 @@
           <p:cNvPr id="3" name="Segnaposto piè di pagina 2">
             <a:extLst>
               <a:ext uri="{FF2B5EF4-FFF2-40B4-BE49-F238E27FC236}">
-                <a16:creationId xmlns:a16="http://schemas.microsoft.com/office/drawing/2014/main" id="{2FD9185D-D91C-8568-B56D-84CE9663DF4C}"/>
+                <a16:creationId xmlns:a16="http://schemas.microsoft.com/office/drawing/2014/main" id="{B39A019A-5E91-1379-77CD-767DAED32AAB}"/>
               </a:ext>
             </a:extLst>
           </p:cNvPr>
@@ -3086,7 +3088,7 @@
           <p:cNvPr id="4" name="Segnaposto numero diapositiva 3">
             <a:extLst>
               <a:ext uri="{FF2B5EF4-FFF2-40B4-BE49-F238E27FC236}">
-                <a16:creationId xmlns:a16="http://schemas.microsoft.com/office/drawing/2014/main" id="{1DCE5FCE-C894-F8F6-9A56-4FBD7EDC24D7}"/>
+                <a16:creationId xmlns:a16="http://schemas.microsoft.com/office/drawing/2014/main" id="{63929E80-6667-875D-067D-976080E95CF5}"/>
               </a:ext>
             </a:extLst>
           </p:cNvPr>
@@ -3104,7 +3106,7 @@
           <a:p>
             <a:fld id="{582BBC32-35E8-4D81-A426-2E8D4D9B0A60}" type="slidenum">
               <a:rPr lang="it-IT" smtClean="0"/>
-              <a:t>‹#›</a:t>
+              <a:t>‹N›</a:t>
             </a:fld>
             <a:endParaRPr lang="it-IT"/>
           </a:p>
@@ -3113,7 +3115,7 @@
     </p:spTree>
     <p:extLst>
       <p:ext uri="{BB962C8B-B14F-4D97-AF65-F5344CB8AC3E}">
-        <p14:creationId xmlns:p14="http://schemas.microsoft.com/office/powerpoint/2010/main" val="335953833"/>
+        <p14:creationId xmlns:p14="http://schemas.microsoft.com/office/powerpoint/2010/main" val="2128193025"/>
       </p:ext>
     </p:extLst>
   </p:cSld>
@@ -3145,7 +3147,7 @@
           <p:cNvPr id="2" name="Titolo 1">
             <a:extLst>
               <a:ext uri="{FF2B5EF4-FFF2-40B4-BE49-F238E27FC236}">
-                <a16:creationId xmlns:a16="http://schemas.microsoft.com/office/drawing/2014/main" id="{A6899464-4A33-F8C7-9931-19A83609CCA5}"/>
+                <a16:creationId xmlns:a16="http://schemas.microsoft.com/office/drawing/2014/main" id="{BB8E5975-9B14-721F-E312-915325B864A1}"/>
               </a:ext>
             </a:extLst>
           </p:cNvPr>
@@ -3182,7 +3184,7 @@
           <p:cNvPr id="3" name="Segnaposto contenuto 2">
             <a:extLst>
               <a:ext uri="{FF2B5EF4-FFF2-40B4-BE49-F238E27FC236}">
-                <a16:creationId xmlns:a16="http://schemas.microsoft.com/office/drawing/2014/main" id="{EB738EB6-E63A-5ECF-D5DE-27B71EEFBA16}"/>
+                <a16:creationId xmlns:a16="http://schemas.microsoft.com/office/drawing/2014/main" id="{84D5CC84-C1FE-FD96-7C53-E9199754BF11}"/>
               </a:ext>
             </a:extLst>
           </p:cNvPr>
@@ -3272,7 +3274,7 @@
           <p:cNvPr id="4" name="Segnaposto testo 3">
             <a:extLst>
               <a:ext uri="{FF2B5EF4-FFF2-40B4-BE49-F238E27FC236}">
-                <a16:creationId xmlns:a16="http://schemas.microsoft.com/office/drawing/2014/main" id="{57D96091-03BC-588E-09DE-1D8E6526886B}"/>
+                <a16:creationId xmlns:a16="http://schemas.microsoft.com/office/drawing/2014/main" id="{2578E02E-2F23-9712-212E-DFA4303D5C70}"/>
               </a:ext>
             </a:extLst>
           </p:cNvPr>
@@ -3343,7 +3345,7 @@
           <p:cNvPr id="5" name="Segnaposto data 4">
             <a:extLst>
               <a:ext uri="{FF2B5EF4-FFF2-40B4-BE49-F238E27FC236}">
-                <a16:creationId xmlns:a16="http://schemas.microsoft.com/office/drawing/2014/main" id="{F020AFEA-3CD1-C9C3-9CCE-4343AAD80761}"/>
+                <a16:creationId xmlns:a16="http://schemas.microsoft.com/office/drawing/2014/main" id="{4E47BD0E-497F-2BAE-0264-82FF8D5B0CE9}"/>
               </a:ext>
             </a:extLst>
           </p:cNvPr>
@@ -3372,7 +3374,7 @@
           <p:cNvPr id="6" name="Segnaposto piè di pagina 5">
             <a:extLst>
               <a:ext uri="{FF2B5EF4-FFF2-40B4-BE49-F238E27FC236}">
-                <a16:creationId xmlns:a16="http://schemas.microsoft.com/office/drawing/2014/main" id="{D667A065-D3F7-1443-2F23-4B6103F0CF3C}"/>
+                <a16:creationId xmlns:a16="http://schemas.microsoft.com/office/drawing/2014/main" id="{2CCAFEF0-7ACE-43F9-82B0-7FE818A971E2}"/>
               </a:ext>
             </a:extLst>
           </p:cNvPr>
@@ -3397,7 +3399,7 @@
           <p:cNvPr id="7" name="Segnaposto numero diapositiva 6">
             <a:extLst>
               <a:ext uri="{FF2B5EF4-FFF2-40B4-BE49-F238E27FC236}">
-                <a16:creationId xmlns:a16="http://schemas.microsoft.com/office/drawing/2014/main" id="{7CCAD753-614B-3B0D-EE61-74413D4F91D2}"/>
+                <a16:creationId xmlns:a16="http://schemas.microsoft.com/office/drawing/2014/main" id="{28548E8B-75F3-7C35-4936-E3061922C3C6}"/>
               </a:ext>
             </a:extLst>
           </p:cNvPr>
@@ -3415,7 +3417,7 @@
           <a:p>
             <a:fld id="{582BBC32-35E8-4D81-A426-2E8D4D9B0A60}" type="slidenum">
               <a:rPr lang="it-IT" smtClean="0"/>
-              <a:t>‹#›</a:t>
+              <a:t>‹N›</a:t>
             </a:fld>
             <a:endParaRPr lang="it-IT"/>
           </a:p>
@@ -3424,7 +3426,7 @@
     </p:spTree>
     <p:extLst>
       <p:ext uri="{BB962C8B-B14F-4D97-AF65-F5344CB8AC3E}">
-        <p14:creationId xmlns:p14="http://schemas.microsoft.com/office/powerpoint/2010/main" val="125586133"/>
+        <p14:creationId xmlns:p14="http://schemas.microsoft.com/office/powerpoint/2010/main" val="861281324"/>
       </p:ext>
     </p:extLst>
   </p:cSld>
@@ -3456,7 +3458,7 @@
           <p:cNvPr id="2" name="Titolo 1">
             <a:extLst>
               <a:ext uri="{FF2B5EF4-FFF2-40B4-BE49-F238E27FC236}">
-                <a16:creationId xmlns:a16="http://schemas.microsoft.com/office/drawing/2014/main" id="{36232BD0-5C10-F8D6-951D-A47752C6012E}"/>
+                <a16:creationId xmlns:a16="http://schemas.microsoft.com/office/drawing/2014/main" id="{53046FC0-650C-CC2B-A7AA-E49665200204}"/>
               </a:ext>
             </a:extLst>
           </p:cNvPr>
@@ -3493,7 +3495,7 @@
           <p:cNvPr id="3" name="Segnaposto immagine 2">
             <a:extLst>
               <a:ext uri="{FF2B5EF4-FFF2-40B4-BE49-F238E27FC236}">
-                <a16:creationId xmlns:a16="http://schemas.microsoft.com/office/drawing/2014/main" id="{A8241C44-3584-F15E-22C0-CCA3558938B4}"/>
+                <a16:creationId xmlns:a16="http://schemas.microsoft.com/office/drawing/2014/main" id="{5DF7C20E-19F7-7DB7-BDBA-8EC14044FB09}"/>
               </a:ext>
             </a:extLst>
           </p:cNvPr>
@@ -3560,7 +3562,7 @@
           <p:cNvPr id="4" name="Segnaposto testo 3">
             <a:extLst>
               <a:ext uri="{FF2B5EF4-FFF2-40B4-BE49-F238E27FC236}">
-                <a16:creationId xmlns:a16="http://schemas.microsoft.com/office/drawing/2014/main" id="{5E301E05-D4F7-C017-6F11-EFCAA652CA41}"/>
+                <a16:creationId xmlns:a16="http://schemas.microsoft.com/office/drawing/2014/main" id="{2664E4FB-12D1-59A0-F786-9DFDC6E74406}"/>
               </a:ext>
             </a:extLst>
           </p:cNvPr>
@@ -3631,7 +3633,7 @@
           <p:cNvPr id="5" name="Segnaposto data 4">
             <a:extLst>
               <a:ext uri="{FF2B5EF4-FFF2-40B4-BE49-F238E27FC236}">
-                <a16:creationId xmlns:a16="http://schemas.microsoft.com/office/drawing/2014/main" id="{8CDE8352-38DD-5379-1E25-5089FDBD0B40}"/>
+                <a16:creationId xmlns:a16="http://schemas.microsoft.com/office/drawing/2014/main" id="{6CF2F288-3452-32F2-54D3-5A8CBB071D31}"/>
               </a:ext>
             </a:extLst>
           </p:cNvPr>
@@ -3660,7 +3662,7 @@
           <p:cNvPr id="6" name="Segnaposto piè di pagina 5">
             <a:extLst>
               <a:ext uri="{FF2B5EF4-FFF2-40B4-BE49-F238E27FC236}">
-                <a16:creationId xmlns:a16="http://schemas.microsoft.com/office/drawing/2014/main" id="{2515904F-71FC-91CD-FA32-15B83EE79DE8}"/>
+                <a16:creationId xmlns:a16="http://schemas.microsoft.com/office/drawing/2014/main" id="{B7154B2C-CA1C-7FB3-267B-0A367C3B0D9B}"/>
               </a:ext>
             </a:extLst>
           </p:cNvPr>
@@ -3685,7 +3687,7 @@
           <p:cNvPr id="7" name="Segnaposto numero diapositiva 6">
             <a:extLst>
               <a:ext uri="{FF2B5EF4-FFF2-40B4-BE49-F238E27FC236}">
-                <a16:creationId xmlns:a16="http://schemas.microsoft.com/office/drawing/2014/main" id="{01CBB7F1-068F-14DF-4E4C-5042AC0D9C22}"/>
+                <a16:creationId xmlns:a16="http://schemas.microsoft.com/office/drawing/2014/main" id="{E254869B-5A32-AE9F-A748-9731A9998690}"/>
               </a:ext>
             </a:extLst>
           </p:cNvPr>
@@ -3703,7 +3705,7 @@
           <a:p>
             <a:fld id="{582BBC32-35E8-4D81-A426-2E8D4D9B0A60}" type="slidenum">
               <a:rPr lang="it-IT" smtClean="0"/>
-              <a:t>‹#›</a:t>
+              <a:t>‹N›</a:t>
             </a:fld>
             <a:endParaRPr lang="it-IT"/>
           </a:p>
@@ -3712,7 +3714,7 @@
     </p:spTree>
     <p:extLst>
       <p:ext uri="{BB962C8B-B14F-4D97-AF65-F5344CB8AC3E}">
-        <p14:creationId xmlns:p14="http://schemas.microsoft.com/office/powerpoint/2010/main" val="636318137"/>
+        <p14:creationId xmlns:p14="http://schemas.microsoft.com/office/powerpoint/2010/main" val="665456416"/>
       </p:ext>
     </p:extLst>
   </p:cSld>
@@ -3749,7 +3751,7 @@
           <p:cNvPr id="2" name="Segnaposto titolo 1">
             <a:extLst>
               <a:ext uri="{FF2B5EF4-FFF2-40B4-BE49-F238E27FC236}">
-                <a16:creationId xmlns:a16="http://schemas.microsoft.com/office/drawing/2014/main" id="{BDEDFED4-5F9A-269F-9381-E1E7028BF8AE}"/>
+                <a16:creationId xmlns:a16="http://schemas.microsoft.com/office/drawing/2014/main" id="{BDEFF8D1-A0E0-1FCA-82C4-27256B28B88A}"/>
               </a:ext>
             </a:extLst>
           </p:cNvPr>
@@ -3787,7 +3789,7 @@
           <p:cNvPr id="3" name="Segnaposto testo 2">
             <a:extLst>
               <a:ext uri="{FF2B5EF4-FFF2-40B4-BE49-F238E27FC236}">
-                <a16:creationId xmlns:a16="http://schemas.microsoft.com/office/drawing/2014/main" id="{ECE1B115-1952-A4D1-811C-21B93BD46E6A}"/>
+                <a16:creationId xmlns:a16="http://schemas.microsoft.com/office/drawing/2014/main" id="{8999AFEE-E27F-F346-38B4-E46D75B9AA01}"/>
               </a:ext>
             </a:extLst>
           </p:cNvPr>
@@ -3854,7 +3856,7 @@
           <p:cNvPr id="4" name="Segnaposto data 3">
             <a:extLst>
               <a:ext uri="{FF2B5EF4-FFF2-40B4-BE49-F238E27FC236}">
-                <a16:creationId xmlns:a16="http://schemas.microsoft.com/office/drawing/2014/main" id="{33F21508-2D48-0A3F-1F30-B941543D6353}"/>
+                <a16:creationId xmlns:a16="http://schemas.microsoft.com/office/drawing/2014/main" id="{BCCFD0E5-4E47-6BF7-528D-D845FDCE7DC7}"/>
               </a:ext>
             </a:extLst>
           </p:cNvPr>
@@ -3901,7 +3903,7 @@
           <p:cNvPr id="5" name="Segnaposto piè di pagina 4">
             <a:extLst>
               <a:ext uri="{FF2B5EF4-FFF2-40B4-BE49-F238E27FC236}">
-                <a16:creationId xmlns:a16="http://schemas.microsoft.com/office/drawing/2014/main" id="{C52833DC-C397-F9FE-40AF-F131B73F0017}"/>
+                <a16:creationId xmlns:a16="http://schemas.microsoft.com/office/drawing/2014/main" id="{C39A88D1-53EC-497B-915E-543669E324DE}"/>
               </a:ext>
             </a:extLst>
           </p:cNvPr>
@@ -3944,7 +3946,7 @@
           <p:cNvPr id="6" name="Segnaposto numero diapositiva 5">
             <a:extLst>
               <a:ext uri="{FF2B5EF4-FFF2-40B4-BE49-F238E27FC236}">
-                <a16:creationId xmlns:a16="http://schemas.microsoft.com/office/drawing/2014/main" id="{89897650-AC7C-D595-F390-E4358C34A7EF}"/>
+                <a16:creationId xmlns:a16="http://schemas.microsoft.com/office/drawing/2014/main" id="{7458D09B-0B79-5292-B305-4F0B6278EE7A}"/>
               </a:ext>
             </a:extLst>
           </p:cNvPr>
@@ -3980,7 +3982,7 @@
           <a:p>
             <a:fld id="{582BBC32-35E8-4D81-A426-2E8D4D9B0A60}" type="slidenum">
               <a:rPr lang="it-IT" smtClean="0"/>
-              <a:t>‹#›</a:t>
+              <a:t>‹N›</a:t>
             </a:fld>
             <a:endParaRPr lang="it-IT"/>
           </a:p>
@@ -3989,23 +3991,23 @@
     </p:spTree>
     <p:extLst>
       <p:ext uri="{BB962C8B-B14F-4D97-AF65-F5344CB8AC3E}">
-        <p14:creationId xmlns:p14="http://schemas.microsoft.com/office/powerpoint/2010/main" val="2110325943"/>
+        <p14:creationId xmlns:p14="http://schemas.microsoft.com/office/powerpoint/2010/main" val="2914082273"/>
       </p:ext>
     </p:extLst>
   </p:cSld>
   <p:clrMap bg1="lt1" tx1="dk1" bg2="lt2" tx2="dk2" accent1="accent1" accent2="accent2" accent3="accent3" accent4="accent4" accent5="accent5" accent6="accent6" hlink="hlink" folHlink="folHlink"/>
   <p:sldLayoutIdLst>
-    <p:sldLayoutId id="2147483649" r:id="rId1"/>
-    <p:sldLayoutId id="2147483650" r:id="rId2"/>
-    <p:sldLayoutId id="2147483651" r:id="rId3"/>
-    <p:sldLayoutId id="2147483652" r:id="rId4"/>
-    <p:sldLayoutId id="2147483653" r:id="rId5"/>
-    <p:sldLayoutId id="2147483654" r:id="rId6"/>
-    <p:sldLayoutId id="2147483655" r:id="rId7"/>
-    <p:sldLayoutId id="2147483656" r:id="rId8"/>
-    <p:sldLayoutId id="2147483657" r:id="rId9"/>
-    <p:sldLayoutId id="2147483658" r:id="rId10"/>
-    <p:sldLayoutId id="2147483659" r:id="rId11"/>
+    <p:sldLayoutId id="2147483673" r:id="rId1"/>
+    <p:sldLayoutId id="2147483674" r:id="rId2"/>
+    <p:sldLayoutId id="2147483675" r:id="rId3"/>
+    <p:sldLayoutId id="2147483676" r:id="rId4"/>
+    <p:sldLayoutId id="2147483677" r:id="rId5"/>
+    <p:sldLayoutId id="2147483678" r:id="rId6"/>
+    <p:sldLayoutId id="2147483679" r:id="rId7"/>
+    <p:sldLayoutId id="2147483680" r:id="rId8"/>
+    <p:sldLayoutId id="2147483681" r:id="rId9"/>
+    <p:sldLayoutId id="2147483682" r:id="rId10"/>
+    <p:sldLayoutId id="2147483683" r:id="rId11"/>
   </p:sldLayoutIdLst>
   <p:txStyles>
     <p:titleStyle>
@@ -4431,8 +4433,8 @@
         </p:blipFill>
         <p:spPr>
           <a:xfrm>
-            <a:off x="8914943" y="1187635"/>
-            <a:ext cx="3277057" cy="4482730"/>
+            <a:off x="8867740" y="1253331"/>
+            <a:ext cx="3181004" cy="4351338"/>
           </a:xfrm>
           <a:prstGeom prst="rect">
             <a:avLst/>
@@ -9705,7 +9707,9 @@
         </p:nvSpPr>
         <p:spPr/>
         <p:txBody>
-          <a:bodyPr/>
+          <a:bodyPr>
+            <a:normAutofit fontScale="70000" lnSpcReduction="20000"/>
+          </a:bodyPr>
           <a:lstStyle/>
           <a:p>
             <a:pPr marL="0" indent="0">
@@ -9824,14 +9828,72 @@
             </a:pPr>
             <a:r>
               <a:rPr lang="en-US" dirty="0"/>
-              <a:t>proved legal</a:t>
-            </a:r>
-          </a:p>
-          <a:p>
-            <a:pPr marL="0" indent="0">
-              <a:buNone/>
-            </a:pPr>
-            <a:endParaRPr lang="en-US"/>
+              <a:t>proved legal.</a:t>
+            </a:r>
+          </a:p>
+          <a:p>
+            <a:pPr marL="0" indent="0">
+              <a:buNone/>
+            </a:pPr>
+            <a:endParaRPr lang="en-US" dirty="0"/>
+          </a:p>
+          <a:p>
+            <a:pPr marL="0" indent="0">
+              <a:buNone/>
+            </a:pPr>
+            <a:r>
+              <a:rPr lang="en-US" dirty="0"/>
+              <a:t>The task:</a:t>
+            </a:r>
+          </a:p>
+          <a:p>
+            <a:pPr marL="0" indent="0">
+              <a:buNone/>
+            </a:pPr>
+            <a:r>
+              <a:rPr lang="en-US" dirty="0"/>
+              <a:t>[move(park1, restaurant), move(restaurant, school), </a:t>
+            </a:r>
+            <a:r>
+              <a:rPr lang="en-US" dirty="0" err="1"/>
+              <a:t>pickUp</a:t>
+            </a:r>
+            <a:r>
+              <a:rPr lang="en-US" dirty="0"/>
+              <a:t>(p2, school), </a:t>
+            </a:r>
+            <a:r>
+              <a:rPr lang="en-US" dirty="0" err="1"/>
+              <a:t>getOff</a:t>
+            </a:r>
+            <a:r>
+              <a:rPr lang="en-US" dirty="0"/>
+              <a:t>(p2, school)].</a:t>
+            </a:r>
+          </a:p>
+          <a:p>
+            <a:pPr marL="0" indent="0">
+              <a:buNone/>
+            </a:pPr>
+            <a:r>
+              <a:rPr lang="en-US" dirty="0"/>
+              <a:t>proved illegal, due to the lack of a request of p2 to reach school.</a:t>
+            </a:r>
+          </a:p>
+          <a:p>
+            <a:pPr marL="0" indent="0">
+              <a:buNone/>
+            </a:pPr>
+            <a:br>
+              <a:rPr lang="en-US" dirty="0"/>
+            </a:br>
+            <a:endParaRPr lang="en-US" dirty="0"/>
+          </a:p>
+          <a:p>
+            <a:pPr marL="0" indent="0">
+              <a:buNone/>
+            </a:pPr>
+            <a:endParaRPr lang="en-US" dirty="0"/>
           </a:p>
           <a:p>
             <a:pPr marL="0" indent="0">
@@ -9963,6 +10025,313 @@
     <p:extLst>
       <p:ext uri="{BB962C8B-B14F-4D97-AF65-F5344CB8AC3E}">
         <p14:creationId xmlns:p14="http://schemas.microsoft.com/office/powerpoint/2010/main" val="717796139"/>
+      </p:ext>
+    </p:extLst>
+  </p:cSld>
+  <p:clrMapOvr>
+    <a:masterClrMapping/>
+  </p:clrMapOvr>
+</p:sld>
+</file>
+
+<file path=ppt/slides/slide20.xml><?xml version="1.0" encoding="utf-8"?>
+<p:sld xmlns:a="http://schemas.openxmlformats.org/drawingml/2006/main" xmlns:r="http://schemas.openxmlformats.org/officeDocument/2006/relationships" xmlns:p="http://schemas.openxmlformats.org/presentationml/2006/main">
+  <p:cSld>
+    <p:spTree>
+      <p:nvGrpSpPr>
+        <p:cNvPr id="1" name=""/>
+        <p:cNvGrpSpPr/>
+        <p:nvPr/>
+      </p:nvGrpSpPr>
+      <p:grpSpPr>
+        <a:xfrm>
+          <a:off x="0" y="0"/>
+          <a:ext cx="0" cy="0"/>
+          <a:chOff x="0" y="0"/>
+          <a:chExt cx="0" cy="0"/>
+        </a:xfrm>
+      </p:grpSpPr>
+      <p:sp>
+        <p:nvSpPr>
+          <p:cNvPr id="2" name="Titolo 1">
+            <a:extLst>
+              <a:ext uri="{FF2B5EF4-FFF2-40B4-BE49-F238E27FC236}">
+                <a16:creationId xmlns:a16="http://schemas.microsoft.com/office/drawing/2014/main" id="{736B2755-46B6-A821-D539-696FB0C327C3}"/>
+              </a:ext>
+            </a:extLst>
+          </p:cNvPr>
+          <p:cNvSpPr>
+            <a:spLocks noGrp="1"/>
+          </p:cNvSpPr>
+          <p:nvPr>
+            <p:ph type="title"/>
+          </p:nvPr>
+        </p:nvSpPr>
+        <p:spPr/>
+        <p:txBody>
+          <a:bodyPr/>
+          <a:lstStyle/>
+          <a:p>
+            <a:r>
+              <a:rPr lang="en-US" dirty="0"/>
+              <a:t>Projection task</a:t>
+            </a:r>
+            <a:endParaRPr lang="it-IT" dirty="0"/>
+          </a:p>
+        </p:txBody>
+      </p:sp>
+      <p:sp>
+        <p:nvSpPr>
+          <p:cNvPr id="3" name="Segnaposto contenuto 2">
+            <a:extLst>
+              <a:ext uri="{FF2B5EF4-FFF2-40B4-BE49-F238E27FC236}">
+                <a16:creationId xmlns:a16="http://schemas.microsoft.com/office/drawing/2014/main" id="{C8DDB4BE-EF19-8B76-7AD8-50314AE79D1F}"/>
+              </a:ext>
+            </a:extLst>
+          </p:cNvPr>
+          <p:cNvSpPr>
+            <a:spLocks noGrp="1"/>
+          </p:cNvSpPr>
+          <p:nvPr>
+            <p:ph idx="1"/>
+          </p:nvPr>
+        </p:nvSpPr>
+        <p:spPr/>
+        <p:txBody>
+          <a:bodyPr>
+            <a:normAutofit fontScale="92500" lnSpcReduction="20000"/>
+          </a:bodyPr>
+          <a:lstStyle/>
+          <a:p>
+            <a:pPr marL="0" indent="0">
+              <a:buNone/>
+            </a:pPr>
+            <a:r>
+              <a:rPr lang="en-US" dirty="0"/>
+              <a:t>For the projection task we wanted to check if a series of actions led to a desired state.</a:t>
+            </a:r>
+          </a:p>
+          <a:p>
+            <a:pPr marL="0" indent="0">
+              <a:buNone/>
+            </a:pPr>
+            <a:r>
+              <a:rPr lang="en-US" dirty="0"/>
+              <a:t>Write the condition 'and(f1(), neg(f2())).':</a:t>
+            </a:r>
+          </a:p>
+          <a:p>
+            <a:pPr marL="0" indent="0">
+              <a:buNone/>
+            </a:pPr>
+            <a:r>
+              <a:rPr lang="en-US" dirty="0"/>
+              <a:t>|: and(</a:t>
+            </a:r>
+            <a:r>
+              <a:rPr lang="en-US" dirty="0" err="1"/>
+              <a:t>taxi_at</a:t>
+            </a:r>
+            <a:r>
+              <a:rPr lang="en-US" dirty="0"/>
+              <a:t>(office), neg(</a:t>
+            </a:r>
+            <a:r>
+              <a:rPr lang="en-US" dirty="0" err="1"/>
+              <a:t>request_to</a:t>
+            </a:r>
+            <a:r>
+              <a:rPr lang="en-US" dirty="0"/>
+              <a:t>(p1, pub))).</a:t>
+            </a:r>
+          </a:p>
+          <a:p>
+            <a:pPr marL="0" indent="0">
+              <a:buNone/>
+            </a:pPr>
+            <a:r>
+              <a:rPr lang="en-US" dirty="0"/>
+              <a:t>Write the sequence of actions '[a1(), ..., an()].':</a:t>
+            </a:r>
+          </a:p>
+          <a:p>
+            <a:pPr marL="0" indent="0">
+              <a:buNone/>
+            </a:pPr>
+            <a:r>
+              <a:rPr lang="en-US" dirty="0"/>
+              <a:t>|: [move(park1, office), </a:t>
+            </a:r>
+            <a:r>
+              <a:rPr lang="en-US" dirty="0" err="1"/>
+              <a:t>pickUp</a:t>
+            </a:r>
+            <a:r>
+              <a:rPr lang="en-US" dirty="0"/>
+              <a:t>(p1, office), move(office, park2), move(park2, school), move(school, pub), </a:t>
+            </a:r>
+            <a:r>
+              <a:rPr lang="en-US" dirty="0" err="1"/>
+              <a:t>getOff</a:t>
+            </a:r>
+            <a:r>
+              <a:rPr lang="en-US" dirty="0"/>
+              <a:t>(p1, pub), move(pub, school), move(school, park2), move(park2, office)].</a:t>
+            </a:r>
+          </a:p>
+          <a:p>
+            <a:pPr marL="0" indent="0">
+              <a:buNone/>
+            </a:pPr>
+            <a:r>
+              <a:rPr lang="en-US" dirty="0"/>
+              <a:t>Condition and(</a:t>
+            </a:r>
+            <a:r>
+              <a:rPr lang="en-US" dirty="0" err="1"/>
+              <a:t>taxi_at</a:t>
+            </a:r>
+            <a:r>
+              <a:rPr lang="en-US" dirty="0"/>
+              <a:t>(office),neg(</a:t>
+            </a:r>
+            <a:r>
+              <a:rPr lang="en-US" dirty="0" err="1"/>
+              <a:t>request_to</a:t>
+            </a:r>
+            <a:r>
+              <a:rPr lang="en-US" dirty="0"/>
+              <a:t>(p1,pub))) HOLDS after executing [move(park1,office),</a:t>
+            </a:r>
+            <a:r>
+              <a:rPr lang="en-US" dirty="0" err="1"/>
+              <a:t>pickUp</a:t>
+            </a:r>
+            <a:r>
+              <a:rPr lang="en-US" dirty="0"/>
+              <a:t>(p1,office),move(office,park2),move(park2,school),move(</a:t>
+            </a:r>
+            <a:r>
+              <a:rPr lang="en-US" dirty="0" err="1"/>
+              <a:t>school,pub</a:t>
+            </a:r>
+            <a:r>
+              <a:rPr lang="en-US" dirty="0"/>
+              <a:t>),</a:t>
+            </a:r>
+            <a:r>
+              <a:rPr lang="en-US" dirty="0" err="1"/>
+              <a:t>getOff</a:t>
+            </a:r>
+            <a:r>
+              <a:rPr lang="en-US" dirty="0"/>
+              <a:t>(p1,pub),move(</a:t>
+            </a:r>
+            <a:r>
+              <a:rPr lang="en-US" dirty="0" err="1"/>
+              <a:t>pub,school</a:t>
+            </a:r>
+            <a:r>
+              <a:rPr lang="en-US" dirty="0"/>
+              <a:t>),move(school,park2),move(park2,office)] true.</a:t>
+            </a:r>
+          </a:p>
+          <a:p>
+            <a:pPr marL="0" indent="0">
+              <a:buNone/>
+            </a:pPr>
+            <a:endParaRPr lang="it-IT" dirty="0"/>
+          </a:p>
+        </p:txBody>
+      </p:sp>
+    </p:spTree>
+    <p:extLst>
+      <p:ext uri="{BB962C8B-B14F-4D97-AF65-F5344CB8AC3E}">
+        <p14:creationId xmlns:p14="http://schemas.microsoft.com/office/powerpoint/2010/main" val="2681970019"/>
+      </p:ext>
+    </p:extLst>
+  </p:cSld>
+  <p:clrMapOvr>
+    <a:masterClrMapping/>
+  </p:clrMapOvr>
+</p:sld>
+</file>
+
+<file path=ppt/slides/slide21.xml><?xml version="1.0" encoding="utf-8"?>
+<p:sld xmlns:a="http://schemas.openxmlformats.org/drawingml/2006/main" xmlns:r="http://schemas.openxmlformats.org/officeDocument/2006/relationships" xmlns:p="http://schemas.openxmlformats.org/presentationml/2006/main">
+  <p:cSld>
+    <p:spTree>
+      <p:nvGrpSpPr>
+        <p:cNvPr id="1" name=""/>
+        <p:cNvGrpSpPr/>
+        <p:nvPr/>
+      </p:nvGrpSpPr>
+      <p:grpSpPr>
+        <a:xfrm>
+          <a:off x="0" y="0"/>
+          <a:ext cx="0" cy="0"/>
+          <a:chOff x="0" y="0"/>
+          <a:chExt cx="0" cy="0"/>
+        </a:xfrm>
+      </p:grpSpPr>
+      <p:sp>
+        <p:nvSpPr>
+          <p:cNvPr id="2" name="Titolo 1">
+            <a:extLst>
+              <a:ext uri="{FF2B5EF4-FFF2-40B4-BE49-F238E27FC236}">
+                <a16:creationId xmlns:a16="http://schemas.microsoft.com/office/drawing/2014/main" id="{89B8278F-19E6-47D4-B228-8CDD91843023}"/>
+              </a:ext>
+            </a:extLst>
+          </p:cNvPr>
+          <p:cNvSpPr>
+            <a:spLocks noGrp="1"/>
+          </p:cNvSpPr>
+          <p:nvPr>
+            <p:ph type="title"/>
+          </p:nvPr>
+        </p:nvSpPr>
+        <p:spPr/>
+        <p:txBody>
+          <a:bodyPr/>
+          <a:lstStyle/>
+          <a:p>
+            <a:r>
+              <a:rPr lang="en-US"/>
+              <a:t>cntroller</a:t>
+            </a:r>
+            <a:endParaRPr lang="it-IT" dirty="0"/>
+          </a:p>
+        </p:txBody>
+      </p:sp>
+      <p:sp>
+        <p:nvSpPr>
+          <p:cNvPr id="3" name="Segnaposto contenuto 2">
+            <a:extLst>
+              <a:ext uri="{FF2B5EF4-FFF2-40B4-BE49-F238E27FC236}">
+                <a16:creationId xmlns:a16="http://schemas.microsoft.com/office/drawing/2014/main" id="{DB238186-5F03-A095-17B1-76B3EF13B53F}"/>
+              </a:ext>
+            </a:extLst>
+          </p:cNvPr>
+          <p:cNvSpPr>
+            <a:spLocks noGrp="1"/>
+          </p:cNvSpPr>
+          <p:nvPr>
+            <p:ph idx="1"/>
+          </p:nvPr>
+        </p:nvSpPr>
+        <p:spPr/>
+        <p:txBody>
+          <a:bodyPr/>
+          <a:lstStyle/>
+          <a:p>
+            <a:endParaRPr lang="it-IT" dirty="0"/>
+          </a:p>
+        </p:txBody>
+      </p:sp>
+    </p:spTree>
+    <p:extLst>
+      <p:ext uri="{BB962C8B-B14F-4D97-AF65-F5344CB8AC3E}">
+        <p14:creationId xmlns:p14="http://schemas.microsoft.com/office/powerpoint/2010/main" val="3270622627"/>
       </p:ext>
     </p:extLst>
   </p:cSld>
@@ -11347,7 +11716,11 @@
           <a:bodyPr/>
           <a:lstStyle/>
           <a:p>
-            <a:endParaRPr lang="it-IT"/>
+            <a:r>
+              <a:rPr lang="en-US" dirty="0"/>
+              <a:t>Problems</a:t>
+            </a:r>
+            <a:endParaRPr lang="it-IT" dirty="0"/>
           </a:p>
         </p:txBody>
       </p:sp>
@@ -12407,8 +12780,8 @@
         </p:blipFill>
         <p:spPr>
           <a:xfrm>
-            <a:off x="8874338" y="1155715"/>
-            <a:ext cx="3174406" cy="4546570"/>
+            <a:off x="9010648" y="1253331"/>
+            <a:ext cx="3038096" cy="4351338"/>
           </a:xfrm>
           <a:prstGeom prst="rect">
             <a:avLst/>
